--- a/presentations/launchminds-agent-evolution-2026-08/launchminds-deck.pptx
+++ b/presentations/launchminds-agent-evolution-2026-08/launchminds-deck.pptx
@@ -510,7 +510,7 @@
           <a:lstStyle/>
           <a:p>
             <a:r>
-              <a:t>Thanks everyone. Today I want to walk you through LaunchMinds — not just what it does, but how it's evolving, and where it's headed next. Our founding idea has always been simple: don't give brands a better tool to run campaigns — have AI figure out the campaign strategy for them. Everything we've built follows from that one line.</a:t>
+              <a:t>Good [morning/afternoon] — I'm here to show you what we've built on top of Minds. Our name isn't an accident: Launch, plus Minds. We picked it because Minds is the foundation everything we do stands on — the same role Claude or GPT-4 plays for other companies, Minds plays for us. What you'll see today is proof of what that foundation makes possible, and where we want to take it next, together.</a:t>
             </a:r>
           </a:p>
         </p:txBody>
@@ -580,7 +580,7 @@
           <a:lstStyle/>
           <a:p>
             <a:r>
-              <a:t>Anyone who's run a brand campaign knows the pain. You're juggling five tools to plan it, another few to launch it across Twitter, Discord, Telegram, on-chain — and then performance data sits in a spreadsheet nobody revisits. There's no loop. Every campaign starts from scratch. That's the gap we built LaunchMinds to close.</a:t>
+              <a:t>Brand marketing today is stitched together by hand — one tool for campaign design, another for deployment, a spreadsheet for resource orchestration, and a person holding it all in their head. That doesn't scale, and it doesn't get smarter over time. We don't think the fix is another point tool. It's a system that reasons across the entire lifecycle — and that requires real intelligence at the core, not automation scripts with an AI label on them.</a:t>
             </a:r>
           </a:p>
         </p:txBody>
@@ -650,7 +650,7 @@
           <a:lstStyle/>
           <a:p>
             <a:r>
-              <a:t>Here's how we describe ourselves today: LaunchMinds is an AI-native, end-to-end brand marketing platform that leverages Harness to build proprietary enterprise contexts — automating the entire lifecycle from campaign design and multi-platform deployment to resource orchestration. In plain terms: we turn a messy marketing problem into a structured, actionable workflow, and that workflow is what drives scalable growth. Harness is the core of that — it's how we build a persistent, proprietary understanding of a brand, and everything downstream runs on top of it.</a:t>
+              <a:t>[read core line]. Two things are doing the work here, and they're worth separating for this room. Harness is our layer — the proprietary context and memory that make a plan actually understand a specific brand, a specific market, a specific history of what's worked before. Minds is what Harness runs on — the model layer, the actual reasoning underneath every plan we generate. Harness without Minds is just a database. Minds without Harness is generic. Together, that's what makes this Minds-driven, not just Minds-adjacent.</a:t>
             </a:r>
           </a:p>
         </p:txBody>
@@ -720,7 +720,7 @@
           <a:lstStyle/>
           <a:p>
             <a:r>
-              <a:t>To explain where LaunchMinds is headed, I want to borrow an analogy from something we all live in daily: how AI-assisted coding has evolved. It went through three distinct stages — and LaunchMinds is climbing that same ladder, one rung behind but on the same trajectory. Let's walk through it.</a:t>
+              <a:t>If you've watched how coding assistants evolved, you've seen this arc: first, assisted completion — suggestions, not action. Then single-session execution — an agent that completes a full task in one sitting, with a human watching. Then true agent mode — long-running, autonomous, checking its own work. We're building LaunchMinds through that same three-stage arc, applied to brand marketing instead of code. And because we built it Minds-native from the start, each stage is a Minds workflow — not a script with a model bolted on.</a:t>
             </a:r>
           </a:p>
         </p:txBody>
@@ -790,7 +790,7 @@
           <a:lstStyle/>
           <a:p>
             <a:r>
-              <a:t>Stage one in coding was inline completion — tools like early Copilot suggesting the next few lines while a human still drove the whole thing. That was LaunchMinds' starting point too. Our AI helped generate campaign content — task descriptions, narrative copy — but a person still designed the strategy and assembled every piece by hand. Useful, but narrow.</a:t>
+              <a:t>Stage one is done and live. This is assisted completion — Minds helping a human draft a campaign: proposing structure, pulling in context Harness has stored, drafting copy. The human stays in the loop at every step. It's the smallest, safest version of Minds-driven work, and it's already saving our team real hours today.</a:t>
             </a:r>
           </a:p>
         </p:txBody>
@@ -860,7 +860,7 @@
           <a:lstStyle/>
           <a:p>
             <a:r>
-              <a:t>Stage two in coding is where a single session can take a full task description and just execute it, start to finish, in one sitting. That's exactly where LaunchMinds is right now. Today, one session handles project registration, campaign strategy planning, and deployment to the platform — all in one pass. It's powered by our internal skill system, which encodes the entire campaign schema and workflow, so we go from a brief to a live campaign without switching tools or people. This is shipped. This is real, working today.</a:t>
+              <a:t>Stage two is what's running in production right now. One session, one Mind, handling registration, planning, and deployment end to end — no handoffs between tools. It runs through our internal skill system, which is essentially a set of structured capabilities we hand to Minds so it can act, not just suggest. This is the first stage where Minds does real work autonomously within a session, and it's in daily use today.</a:t>
             </a:r>
           </a:p>
         </p:txBody>
@@ -930,7 +930,7 @@
           <a:lstStyle/>
           <a:p>
             <a:r>
-              <a:t>Stage three in coding is agent mode — not one bounded session, but a persistent system of multiple agents, each with a role, coordinating over time. That's the milestone we're now chasing. We're building a persistent workspace for every project, seeded by Harness — our proprietary brand context. Inside it, multiple 'Minds' divide the labor: one plans the marketing strategy, one executes and deploys it, one analyzes how the campaign actually performed, and one feeds that analysis back into the next round's plan. Not one-shot — a continuous, self-improving loop.</a:t>
+              <a:t>Stage three is our next milestone, and it's the part I think matters most for this room. We're building a per-project workspace where multiple Minds instances run side by side — one planning, one executing, one analyzing results, one adjusting the plan based on what it sees — coordinating with each other in a continuous loop. These aren't roles we're loosely calling 'Minds.' They're literal Minds models, each doing a distinct job, talking to each other. This is the clearest place you'll see what your platform makes possible when we push it toward real multi-agent coordination.</a:t>
             </a:r>
           </a:p>
         </p:txBody>
@@ -1000,7 +1000,7 @@
           <a:lstStyle/>
           <a:p>
             <a:r>
-              <a:t>One piece of that loop deserves special mention: the analysis Mind. Marketing attribution is hard to get right, and we want it to be genuinely rigorous, not just a dashboard. So we're currently exploring a collaboration with Sapien, with the goal of combining forces to deliver the most professional, rigorous marketing analysis in the space. It's early — an active conversation, not a done deal — but it's a direction we're excited about.</a:t>
+              <a:t>One open thread, for full transparency: we're in early conversations with Sapien about the analyze step in that stage-three loop — whether their approach complements what Minds already gives us. To be clear, this is exploration, not a commitment. We want to be upfront about what's decided and what's still being evaluated, because that honesty is part of how we want to build this relationship with you.</a:t>
             </a:r>
           </a:p>
         </p:txBody>
@@ -1070,7 +1070,7 @@
           <a:lstStyle/>
           <a:p>
             <a:r>
-              <a:t>So to recap: we've already lived through the first two stages ourselves — content assistance, then full single-session execution, which is running today. The next milestone we're chasing is agent mode: persistent, per-brand workspaces where multiple Minds plan, execute, analyze, and adjust in a continuous loop. That's how we turn complex marketing needs into structured, actionable workflows — and that's what drives scalable user growth and real brand impact. We've built the first two stages. Now we're building the third. Thank you.</a:t>
+              <a:t>So: two stages shipped and running, one stage actively in motion, built on Minds from day one — not as an integration bolted on after the fact, but as the foundation. We're showing you this because we think it's a good answer to the question every platform has to answer eventually: what gets built on top of us? We'd like to keep building that answer together — with your platform, and with your community. Thanks for the time.</a:t>
             </a:r>
           </a:p>
         </p:txBody>
@@ -4136,7 +4136,7 @@
         </p:nvSpPr>
         <p:spPr>
           <a:xfrm>
-            <a:off x="822960" y="1965960"/>
+            <a:off x="822960" y="1691640"/>
             <a:ext cx="10058400" cy="457200"/>
           </a:xfrm>
           <a:prstGeom prst="rect">
@@ -4175,8 +4175,8 @@
         </p:nvSpPr>
         <p:spPr>
           <a:xfrm>
-            <a:off x="777240" y="2377440"/>
-            <a:ext cx="10515600" cy="1463040"/>
+            <a:off x="777240" y="2103120"/>
+            <a:ext cx="10515600" cy="1737360"/>
           </a:xfrm>
           <a:prstGeom prst="rect">
             <a:avLst/>
@@ -4201,7 +4201,7 @@
                 </a:solidFill>
                 <a:latin typeface="Avenir Next"/>
               </a:rPr>
-              <a:t>From Assistant</a:t>
+              <a:t>Built on Minds,</a:t>
             </a:r>
           </a:p>
           <a:p>
@@ -4217,7 +4217,7 @@
                 </a:solidFill>
                 <a:latin typeface="Avenir Next"/>
               </a:rPr>
-              <a:t>to Autonomous</a:t>
+              <a:t>From Day One</a:t>
             </a:r>
           </a:p>
         </p:txBody>
@@ -4230,7 +4230,7 @@
         </p:nvSpPr>
         <p:spPr>
           <a:xfrm>
-            <a:off x="822960" y="3977639"/>
+            <a:off x="822960" y="3931920"/>
             <a:ext cx="9601200" cy="548640"/>
           </a:xfrm>
           <a:prstGeom prst="rect">
@@ -4256,7 +4256,7 @@
                 </a:solidFill>
                 <a:latin typeface="Avenir Next"/>
               </a:rPr>
-              <a:t>How we're teaching AI to run the entire brand campaign lifecycle</a:t>
+              <a:t>Powered by Minds, built with Harness.</a:t>
             </a:r>
           </a:p>
         </p:txBody>
@@ -4269,8 +4269,8 @@
         </p:nvSpPr>
         <p:spPr>
           <a:xfrm>
-            <a:off x="822960" y="4800600"/>
-            <a:ext cx="9875520" cy="1463040"/>
+            <a:off x="822960" y="4663440"/>
+            <a:ext cx="9875520" cy="1645920"/>
           </a:xfrm>
           <a:prstGeom prst="rect">
             <a:avLst/>
@@ -4317,7 +4317,7 @@
                 </a:solidFill>
                 <a:latin typeface="Avenir Next"/>
               </a:rPr>
-              <a:t>—  Not a better tool — AI that figures out the strategy</a:t>
+              <a:t>—  Powered by Minds, built with Harness</a:t>
             </a:r>
           </a:p>
           <a:p>
@@ -4336,7 +4336,7 @@
                 </a:solidFill>
                 <a:latin typeface="Avenir Next"/>
               </a:rPr>
-              <a:t>—  Today: where we are, and where we're going next</a:t>
+              <a:t>—  A partnership story, not just a product demo</a:t>
             </a:r>
           </a:p>
         </p:txBody>
@@ -4537,7 +4537,7 @@
         <p:spPr>
           <a:xfrm>
             <a:off x="502920" y="960120"/>
-            <a:ext cx="10515600" cy="822960"/>
+            <a:ext cx="10515600" cy="1188720"/>
           </a:xfrm>
           <a:prstGeom prst="rect">
             <a:avLst/>
@@ -4552,7 +4552,7 @@
           <a:p>
             <a:pPr algn="l">
               <a:lnSpc>
-                <a:spcPct val="115000"/>
+                <a:spcPct val="110000"/>
               </a:lnSpc>
             </a:pPr>
             <a:r>
@@ -4562,7 +4562,23 @@
                 </a:solidFill>
                 <a:latin typeface="Avenir Next"/>
               </a:rPr>
-              <a:t>Brand marketing today is fragmented</a:t>
+              <a:t>Marketing today is stitched</a:t>
+            </a:r>
+          </a:p>
+          <a:p>
+            <a:pPr algn="l">
+              <a:lnSpc>
+                <a:spcPct val="110000"/>
+              </a:lnSpc>
+            </a:pPr>
+            <a:r>
+              <a:rPr sz="3600" b="1" i="0">
+                <a:solidFill>
+                  <a:srgbClr val="F2F4F8"/>
+                </a:solidFill>
+                <a:latin typeface="Avenir Next"/>
+              </a:rPr>
+              <a:t>together by hand</a:t>
             </a:r>
           </a:p>
         </p:txBody>
@@ -4575,7 +4591,7 @@
         </p:nvSpPr>
         <p:spPr>
           <a:xfrm>
-            <a:off x="502920" y="2194560"/>
+            <a:off x="502920" y="2606040"/>
             <a:ext cx="10515600" cy="2926080"/>
           </a:xfrm>
           <a:prstGeom prst="rect">
@@ -4594,17 +4610,17 @@
                 <a:spcPct val="120000"/>
               </a:lnSpc>
               <a:spcAft>
-                <a:spcPts val="2000"/>
+                <a:spcPts val="1800"/>
               </a:spcAft>
             </a:pPr>
             <a:r>
-              <a:rPr sz="2000">
+              <a:rPr sz="1900">
                 <a:solidFill>
                   <a:srgbClr val="F2F4F8"/>
                 </a:solidFill>
                 <a:latin typeface="Avenir Next"/>
               </a:rPr>
-              <a:t>—  Campaign marketing is fragmented across tools</a:t>
+              <a:t>—  One tool for campaign design, another for deployment, a spreadsheet for the rest</a:t>
             </a:r>
           </a:p>
           <a:p>
@@ -4613,17 +4629,17 @@
                 <a:spcPct val="120000"/>
               </a:lnSpc>
               <a:spcAft>
-                <a:spcPts val="2000"/>
+                <a:spcPts val="1800"/>
               </a:spcAft>
             </a:pPr>
             <a:r>
-              <a:rPr sz="2000">
+              <a:rPr sz="1900">
                 <a:solidFill>
                   <a:srgbClr val="F2F4F8"/>
                 </a:solidFill>
                 <a:latin typeface="Avenir Next"/>
               </a:rPr>
-              <a:t>—  Strategy is manual, slow, and inconsistent</a:t>
+              <a:t>—  Campaign design, deployment, resource orchestration — all disconnected</a:t>
             </a:r>
           </a:p>
           <a:p>
@@ -4632,17 +4648,17 @@
                 <a:spcPct val="120000"/>
               </a:lnSpc>
               <a:spcAft>
-                <a:spcPts val="2000"/>
+                <a:spcPts val="1800"/>
               </a:spcAft>
             </a:pPr>
             <a:r>
-              <a:rPr sz="2000">
+              <a:rPr sz="1900">
                 <a:solidFill>
                   <a:srgbClr val="F2F4F8"/>
                 </a:solidFill>
                 <a:latin typeface="Avenir Next"/>
               </a:rPr>
-              <a:t>—  Execution and analysis live in separate silos</a:t>
+              <a:t>—  It doesn't scale, and it doesn't get smarter over time</a:t>
             </a:r>
           </a:p>
           <a:p>
@@ -4651,17 +4667,17 @@
                 <a:spcPct val="120000"/>
               </a:lnSpc>
               <a:spcAft>
-                <a:spcPts val="2000"/>
+                <a:spcPts val="1800"/>
               </a:spcAft>
             </a:pPr>
             <a:r>
-              <a:rPr sz="2000">
+              <a:rPr sz="1900">
                 <a:solidFill>
                   <a:srgbClr val="F2F4F8"/>
                 </a:solidFill>
                 <a:latin typeface="Avenir Next"/>
               </a:rPr>
-              <a:t>—  No real feedback loop back into the next campaign</a:t>
+              <a:t>—  The fix isn't another point tool — it's a system that reasons across the whole lifecycle</a:t>
             </a:r>
           </a:p>
         </p:txBody>
@@ -4700,7 +4716,7 @@
                 </a:solidFill>
                 <a:latin typeface="Avenir Next"/>
               </a:rPr>
-              <a:t>LaunchMinds  ·  From Assistant to Autonomous  ·  2026</a:t>
+              <a:t>LaunchMinds  ·  Built on Minds  ·  2026</a:t>
             </a:r>
           </a:p>
         </p:txBody>
@@ -4861,7 +4877,7 @@
         </p:nvSpPr>
         <p:spPr>
           <a:xfrm>
-            <a:off x="502920" y="960120"/>
+            <a:off x="502920" y="914400"/>
             <a:ext cx="10515600" cy="640080"/>
           </a:xfrm>
           <a:prstGeom prst="rect">
@@ -4881,13 +4897,13 @@
               </a:lnSpc>
             </a:pPr>
             <a:r>
-              <a:rPr sz="3600" b="1" i="0">
+              <a:rPr sz="3400" b="1" i="0">
                 <a:solidFill>
                   <a:srgbClr val="F2F4F8"/>
                 </a:solidFill>
                 <a:latin typeface="Avenir Next"/>
               </a:rPr>
-              <a:t>What LaunchMinds is, today</a:t>
+              <a:t>LaunchMinds = Harness + Minds</a:t>
             </a:r>
           </a:p>
         </p:txBody>
@@ -4900,12 +4916,12 @@
         </p:nvSpPr>
         <p:spPr>
           <a:xfrm>
-            <a:off x="502920" y="1874519"/>
-            <a:ext cx="11155680" cy="2331720"/>
+            <a:off x="502920" y="1691640"/>
+            <a:ext cx="4937760" cy="914400"/>
           </a:xfrm>
           <a:prstGeom prst="roundRect">
             <a:avLst>
-              <a:gd name="adj" fmla="val 6000"/>
+              <a:gd name="adj" fmla="val 8000"/>
             </a:avLst>
           </a:prstGeom>
           <a:solidFill>
@@ -4940,14 +4956,345 @@
       </p:sp>
       <p:sp>
         <p:nvSpPr>
-          <p:cNvPr id="7" name="Rectangle 6"/>
+          <p:cNvPr id="7" name="TextBox 6"/>
+          <p:cNvSpPr txBox="1"/>
+          <p:nvPr/>
+        </p:nvSpPr>
+        <p:spPr>
+          <a:xfrm>
+            <a:off x="822960" y="1837944"/>
+            <a:ext cx="4297680" cy="320040"/>
+          </a:xfrm>
+          <a:prstGeom prst="rect">
+            <a:avLst/>
+          </a:prstGeom>
+          <a:noFill/>
+        </p:spPr>
+        <p:txBody>
+          <a:bodyPr wrap="square" anchor="t">
+            <a:spAutoFit/>
+          </a:bodyPr>
+          <a:lstStyle/>
+          <a:p>
+            <a:pPr algn="l">
+              <a:lnSpc>
+                <a:spcPct val="115000"/>
+              </a:lnSpc>
+            </a:pPr>
+            <a:r>
+              <a:rPr sz="1500" b="1" i="0">
+                <a:solidFill>
+                  <a:srgbClr val="5EE6C0"/>
+                </a:solidFill>
+                <a:latin typeface="Avenir Next"/>
+              </a:rPr>
+              <a:t>HARNESS</a:t>
+            </a:r>
+          </a:p>
+        </p:txBody>
+      </p:sp>
+      <p:sp>
+        <p:nvSpPr>
+          <p:cNvPr id="8" name="TextBox 7"/>
+          <p:cNvSpPr txBox="1"/>
+          <p:nvPr/>
+        </p:nvSpPr>
+        <p:spPr>
+          <a:xfrm>
+            <a:off x="822960" y="2167128"/>
+            <a:ext cx="4297680" cy="365760"/>
+          </a:xfrm>
+          <a:prstGeom prst="rect">
+            <a:avLst/>
+          </a:prstGeom>
+          <a:noFill/>
+        </p:spPr>
+        <p:txBody>
+          <a:bodyPr wrap="square" anchor="t">
+            <a:spAutoFit/>
+          </a:bodyPr>
+          <a:lstStyle/>
+          <a:p>
+            <a:pPr algn="l">
+              <a:lnSpc>
+                <a:spcPct val="115000"/>
+              </a:lnSpc>
+            </a:pPr>
+            <a:r>
+              <a:rPr sz="1350" b="0" i="0">
+                <a:solidFill>
+                  <a:srgbClr val="A6AFC2"/>
+                </a:solidFill>
+                <a:latin typeface="Avenir Next"/>
+              </a:rPr>
+              <a:t>Context layer — proprietary enterprise memory</a:t>
+            </a:r>
+          </a:p>
+        </p:txBody>
+      </p:sp>
+      <p:sp>
+        <p:nvSpPr>
+          <p:cNvPr id="9" name="TextBox 8"/>
+          <p:cNvSpPr txBox="1"/>
+          <p:nvPr/>
+        </p:nvSpPr>
+        <p:spPr>
+          <a:xfrm>
+            <a:off x="5623560" y="1947672"/>
+            <a:ext cx="457200" cy="457200"/>
+          </a:xfrm>
+          <a:prstGeom prst="rect">
+            <a:avLst/>
+          </a:prstGeom>
+          <a:noFill/>
+        </p:spPr>
+        <p:txBody>
+          <a:bodyPr wrap="square" anchor="t">
+            <a:spAutoFit/>
+          </a:bodyPr>
+          <a:lstStyle/>
+          <a:p>
+            <a:pPr algn="ctr">
+              <a:lnSpc>
+                <a:spcPct val="115000"/>
+              </a:lnSpc>
+            </a:pPr>
+            <a:r>
+              <a:rPr sz="3000" b="0" i="0">
+                <a:solidFill>
+                  <a:srgbClr val="6B748C"/>
+                </a:solidFill>
+                <a:latin typeface="Avenir Next"/>
+              </a:rPr>
+              <a:t>+</a:t>
+            </a:r>
+          </a:p>
+        </p:txBody>
+      </p:sp>
+      <p:sp>
+        <p:nvSpPr>
+          <p:cNvPr id="10" name="Rounded Rectangle 9"/>
           <p:cNvSpPr/>
           <p:nvPr/>
         </p:nvSpPr>
         <p:spPr>
           <a:xfrm>
-            <a:off x="502920" y="1874519"/>
-            <a:ext cx="82296" cy="2331720"/>
+            <a:off x="6263640" y="1691640"/>
+            <a:ext cx="4937760" cy="914400"/>
+          </a:xfrm>
+          <a:prstGeom prst="roundRect">
+            <a:avLst>
+              <a:gd name="adj" fmla="val 8000"/>
+            </a:avLst>
+          </a:prstGeom>
+          <a:solidFill>
+            <a:srgbClr val="182138"/>
+          </a:solidFill>
+          <a:ln>
+            <a:noFill/>
+          </a:ln>
+          <a:effectLst/>
+        </p:spPr>
+        <p:style>
+          <a:lnRef idx="1">
+            <a:schemeClr val="accent1"/>
+          </a:lnRef>
+          <a:fillRef idx="3">
+            <a:schemeClr val="accent1"/>
+          </a:fillRef>
+          <a:effectRef idx="2">
+            <a:schemeClr val="accent1"/>
+          </a:effectRef>
+          <a:fontRef idx="minor">
+            <a:schemeClr val="lt1"/>
+          </a:fontRef>
+        </p:style>
+        <p:txBody>
+          <a:bodyPr rtlCol="0" anchor="ctr"/>
+          <a:lstStyle/>
+          <a:p>
+            <a:pPr algn="ctr"/>
+          </a:p>
+        </p:txBody>
+      </p:sp>
+      <p:sp>
+        <p:nvSpPr>
+          <p:cNvPr id="11" name="Rectangle 10"/>
+          <p:cNvSpPr/>
+          <p:nvPr/>
+        </p:nvSpPr>
+        <p:spPr>
+          <a:xfrm>
+            <a:off x="6263640" y="1691640"/>
+            <a:ext cx="73152" cy="914400"/>
+          </a:xfrm>
+          <a:prstGeom prst="rect">
+            <a:avLst/>
+          </a:prstGeom>
+          <a:solidFill>
+            <a:srgbClr val="7C9CFF"/>
+          </a:solidFill>
+          <a:ln>
+            <a:noFill/>
+          </a:ln>
+          <a:effectLst/>
+        </p:spPr>
+        <p:style>
+          <a:lnRef idx="1">
+            <a:schemeClr val="accent1"/>
+          </a:lnRef>
+          <a:fillRef idx="3">
+            <a:schemeClr val="accent1"/>
+          </a:fillRef>
+          <a:effectRef idx="2">
+            <a:schemeClr val="accent1"/>
+          </a:effectRef>
+          <a:fontRef idx="minor">
+            <a:schemeClr val="lt1"/>
+          </a:fontRef>
+        </p:style>
+        <p:txBody>
+          <a:bodyPr rtlCol="0" anchor="ctr"/>
+          <a:lstStyle/>
+          <a:p>
+            <a:pPr algn="ctr"/>
+          </a:p>
+        </p:txBody>
+      </p:sp>
+      <p:sp>
+        <p:nvSpPr>
+          <p:cNvPr id="12" name="TextBox 11"/>
+          <p:cNvSpPr txBox="1"/>
+          <p:nvPr/>
+        </p:nvSpPr>
+        <p:spPr>
+          <a:xfrm>
+            <a:off x="6583680" y="1837944"/>
+            <a:ext cx="4297680" cy="320040"/>
+          </a:xfrm>
+          <a:prstGeom prst="rect">
+            <a:avLst/>
+          </a:prstGeom>
+          <a:noFill/>
+        </p:spPr>
+        <p:txBody>
+          <a:bodyPr wrap="square" anchor="t">
+            <a:spAutoFit/>
+          </a:bodyPr>
+          <a:lstStyle/>
+          <a:p>
+            <a:pPr algn="l">
+              <a:lnSpc>
+                <a:spcPct val="115000"/>
+              </a:lnSpc>
+            </a:pPr>
+            <a:r>
+              <a:rPr sz="1500" b="1" i="0">
+                <a:solidFill>
+                  <a:srgbClr val="7C9CFF"/>
+                </a:solidFill>
+                <a:latin typeface="Avenir Next"/>
+              </a:rPr>
+              <a:t>MINDS</a:t>
+            </a:r>
+          </a:p>
+        </p:txBody>
+      </p:sp>
+      <p:sp>
+        <p:nvSpPr>
+          <p:cNvPr id="13" name="TextBox 12"/>
+          <p:cNvSpPr txBox="1"/>
+          <p:nvPr/>
+        </p:nvSpPr>
+        <p:spPr>
+          <a:xfrm>
+            <a:off x="6583680" y="2167128"/>
+            <a:ext cx="4297680" cy="365760"/>
+          </a:xfrm>
+          <a:prstGeom prst="rect">
+            <a:avLst/>
+          </a:prstGeom>
+          <a:noFill/>
+        </p:spPr>
+        <p:txBody>
+          <a:bodyPr wrap="square" anchor="t">
+            <a:spAutoFit/>
+          </a:bodyPr>
+          <a:lstStyle/>
+          <a:p>
+            <a:pPr algn="l">
+              <a:lnSpc>
+                <a:spcPct val="115000"/>
+              </a:lnSpc>
+            </a:pPr>
+            <a:r>
+              <a:rPr sz="1350" b="0" i="0">
+                <a:solidFill>
+                  <a:srgbClr val="A6AFC2"/>
+                </a:solidFill>
+                <a:latin typeface="Avenir Next"/>
+              </a:rPr>
+              <a:t>Model layer — the reasoning engine underneath</a:t>
+            </a:r>
+          </a:p>
+        </p:txBody>
+      </p:sp>
+      <p:sp>
+        <p:nvSpPr>
+          <p:cNvPr id="14" name="Rounded Rectangle 13"/>
+          <p:cNvSpPr/>
+          <p:nvPr/>
+        </p:nvSpPr>
+        <p:spPr>
+          <a:xfrm>
+            <a:off x="502920" y="2926080"/>
+            <a:ext cx="11155680" cy="1874519"/>
+          </a:xfrm>
+          <a:prstGeom prst="roundRect">
+            <a:avLst>
+              <a:gd name="adj" fmla="val 6000"/>
+            </a:avLst>
+          </a:prstGeom>
+          <a:solidFill>
+            <a:srgbClr val="141B2E"/>
+          </a:solidFill>
+          <a:ln>
+            <a:noFill/>
+          </a:ln>
+          <a:effectLst/>
+        </p:spPr>
+        <p:style>
+          <a:lnRef idx="1">
+            <a:schemeClr val="accent1"/>
+          </a:lnRef>
+          <a:fillRef idx="3">
+            <a:schemeClr val="accent1"/>
+          </a:fillRef>
+          <a:effectRef idx="2">
+            <a:schemeClr val="accent1"/>
+          </a:effectRef>
+          <a:fontRef idx="minor">
+            <a:schemeClr val="lt1"/>
+          </a:fontRef>
+        </p:style>
+        <p:txBody>
+          <a:bodyPr rtlCol="0" anchor="ctr"/>
+          <a:lstStyle/>
+          <a:p>
+            <a:pPr algn="ctr"/>
+          </a:p>
+        </p:txBody>
+      </p:sp>
+      <p:sp>
+        <p:nvSpPr>
+          <p:cNvPr id="15" name="Rectangle 14"/>
+          <p:cNvSpPr/>
+          <p:nvPr/>
+        </p:nvSpPr>
+        <p:spPr>
+          <a:xfrm>
+            <a:off x="502920" y="2926080"/>
+            <a:ext cx="82296" cy="1874519"/>
           </a:xfrm>
           <a:prstGeom prst="rect">
             <a:avLst/>
@@ -4984,14 +5331,14 @@
       </p:sp>
       <p:sp>
         <p:nvSpPr>
-          <p:cNvPr id="8" name="TextBox 7"/>
+          <p:cNvPr id="16" name="TextBox 15"/>
           <p:cNvSpPr txBox="1"/>
           <p:nvPr/>
         </p:nvSpPr>
         <p:spPr>
           <a:xfrm>
-            <a:off x="914400" y="2103120"/>
-            <a:ext cx="10332720" cy="1920240"/>
+            <a:off x="914400" y="3108960"/>
+            <a:ext cx="10332720" cy="1554480"/>
           </a:xfrm>
           <a:prstGeom prst="rect">
             <a:avLst/>
@@ -5006,11 +5353,11 @@
           <a:p>
             <a:pPr algn="l">
               <a:lnSpc>
-                <a:spcPct val="130000"/>
-              </a:lnSpc>
-            </a:pPr>
-            <a:r>
-              <a:rPr sz="2200" b="0" i="1">
+                <a:spcPct val="128000"/>
+              </a:lnSpc>
+            </a:pPr>
+            <a:r>
+              <a:rPr sz="1850" b="0" i="1">
                 <a:solidFill>
                   <a:srgbClr val="F2F4F8"/>
                 </a:solidFill>
@@ -5023,94 +5370,14 @@
       </p:sp>
       <p:sp>
         <p:nvSpPr>
-          <p:cNvPr id="9" name="TextBox 8"/>
+          <p:cNvPr id="17" name="TextBox 16"/>
           <p:cNvSpPr txBox="1"/>
           <p:nvPr/>
         </p:nvSpPr>
         <p:spPr>
           <a:xfrm>
-            <a:off x="502920" y="4526280"/>
-            <a:ext cx="10515600" cy="1463040"/>
-          </a:xfrm>
-          <a:prstGeom prst="rect">
-            <a:avLst/>
-          </a:prstGeom>
-          <a:noFill/>
-        </p:spPr>
-        <p:txBody>
-          <a:bodyPr wrap="square">
-            <a:spAutoFit/>
-          </a:bodyPr>
-          <a:lstStyle/>
-          <a:p>
-            <a:pPr>
-              <a:lnSpc>
-                <a:spcPct val="120000"/>
-              </a:lnSpc>
-              <a:spcAft>
-                <a:spcPts val="1000"/>
-              </a:spcAft>
-            </a:pPr>
-            <a:r>
-              <a:rPr sz="1650">
-                <a:solidFill>
-                  <a:srgbClr val="A6AFC2"/>
-                </a:solidFill>
-                <a:latin typeface="Avenir Next"/>
-              </a:rPr>
-              <a:t>—  Transforms complex marketing needs into structured, actionable workflows</a:t>
-            </a:r>
-          </a:p>
-          <a:p>
-            <a:pPr>
-              <a:lnSpc>
-                <a:spcPct val="120000"/>
-              </a:lnSpc>
-              <a:spcAft>
-                <a:spcPts val="1000"/>
-              </a:spcAft>
-            </a:pPr>
-            <a:r>
-              <a:rPr sz="1650">
-                <a:solidFill>
-                  <a:srgbClr val="A6AFC2"/>
-                </a:solidFill>
-                <a:latin typeface="Avenir Next"/>
-              </a:rPr>
-              <a:t>—  Drives scalable user growth and brand impact</a:t>
-            </a:r>
-          </a:p>
-          <a:p>
-            <a:pPr>
-              <a:lnSpc>
-                <a:spcPct val="120000"/>
-              </a:lnSpc>
-              <a:spcAft>
-                <a:spcPts val="1000"/>
-              </a:spcAft>
-            </a:pPr>
-            <a:r>
-              <a:rPr sz="1650">
-                <a:solidFill>
-                  <a:srgbClr val="A6AFC2"/>
-                </a:solidFill>
-                <a:latin typeface="Avenir Next"/>
-              </a:rPr>
-              <a:t>—  Harness = the mechanism that builds a persistent, proprietary brand context</a:t>
-            </a:r>
-          </a:p>
-        </p:txBody>
-      </p:sp>
-      <p:sp>
-        <p:nvSpPr>
-          <p:cNvPr id="10" name="TextBox 9"/>
-          <p:cNvSpPr txBox="1"/>
-          <p:nvPr/>
-        </p:nvSpPr>
-        <p:spPr>
-          <a:xfrm>
-            <a:off x="502920" y="6492240"/>
-            <a:ext cx="8229600" cy="274320"/>
+            <a:off x="502920" y="5074920"/>
+            <a:ext cx="10789920" cy="822960"/>
           </a:xfrm>
           <a:prstGeom prst="rect">
             <a:avLst/>
@@ -5125,6 +5392,61 @@
           <a:p>
             <a:pPr algn="l">
               <a:lnSpc>
+                <a:spcPct val="130000"/>
+              </a:lnSpc>
+            </a:pPr>
+            <a:r>
+              <a:rPr sz="1650" b="0" i="1">
+                <a:solidFill>
+                  <a:srgbClr val="5EE6C0"/>
+                </a:solidFill>
+                <a:latin typeface="Avenir Next"/>
+              </a:rPr>
+              <a:t>Harness without Minds is just a database. Minds without Harness is generic.</a:t>
+            </a:r>
+          </a:p>
+          <a:p>
+            <a:pPr algn="l">
+              <a:lnSpc>
+                <a:spcPct val="130000"/>
+              </a:lnSpc>
+            </a:pPr>
+            <a:r>
+              <a:rPr sz="1650" b="0" i="1">
+                <a:solidFill>
+                  <a:srgbClr val="5EE6C0"/>
+                </a:solidFill>
+                <a:latin typeface="Avenir Next"/>
+              </a:rPr>
+              <a:t>Together, that's Minds-driven — not just Minds-adjacent.</a:t>
+            </a:r>
+          </a:p>
+        </p:txBody>
+      </p:sp>
+      <p:sp>
+        <p:nvSpPr>
+          <p:cNvPr id="18" name="TextBox 17"/>
+          <p:cNvSpPr txBox="1"/>
+          <p:nvPr/>
+        </p:nvSpPr>
+        <p:spPr>
+          <a:xfrm>
+            <a:off x="502920" y="6492240"/>
+            <a:ext cx="8229600" cy="274320"/>
+          </a:xfrm>
+          <a:prstGeom prst="rect">
+            <a:avLst/>
+          </a:prstGeom>
+          <a:noFill/>
+        </p:spPr>
+        <p:txBody>
+          <a:bodyPr wrap="square" anchor="t">
+            <a:spAutoFit/>
+          </a:bodyPr>
+          <a:lstStyle/>
+          <a:p>
+            <a:pPr algn="l">
+              <a:lnSpc>
                 <a:spcPct val="115000"/>
               </a:lnSpc>
             </a:pPr>
@@ -5135,7 +5457,7 @@
                 </a:solidFill>
                 <a:latin typeface="Avenir Next"/>
               </a:rPr>
-              <a:t>LaunchMinds  ·  From Assistant to Autonomous  ·  2026</a:t>
+              <a:t>LaunchMinds  ·  Built on Minds  ·  2026</a:t>
             </a:r>
           </a:p>
         </p:txBody>
@@ -5322,7 +5644,7 @@
                 </a:solidFill>
                 <a:latin typeface="Avenir Next"/>
               </a:rPr>
-              <a:t>A familiar pattern</a:t>
+              <a:t>How agents evolve</a:t>
             </a:r>
           </a:p>
         </p:txBody>
@@ -5361,7 +5683,7 @@
                 </a:solidFill>
                 <a:latin typeface="Avenir Next"/>
               </a:rPr>
-              <a:t>AI-assisted coding evolved through three recognizable stages.</a:t>
+              <a:t>The same arc coding tools went through.</a:t>
             </a:r>
           </a:p>
           <a:p>
@@ -5377,7 +5699,7 @@
                 </a:solidFill>
                 <a:latin typeface="Avenir Next"/>
               </a:rPr>
-              <a:t>LaunchMinds is climbing the exact same ladder.</a:t>
+              <a:t>We're climbing it stage by stage — natively on Minds.</a:t>
             </a:r>
           </a:p>
         </p:txBody>
@@ -5914,7 +6236,7 @@
                 </a:solidFill>
                 <a:latin typeface="Avenir Next"/>
               </a:rPr>
-              <a:t>We're not guessing at the roadmap — we're following a proven curve.</a:t>
+              <a:t>Each stage is a Minds workflow — not a script with a model bolted on.</a:t>
             </a:r>
           </a:p>
         </p:txBody>
@@ -5953,7 +6275,7 @@
                 </a:solidFill>
                 <a:latin typeface="Avenir Next"/>
               </a:rPr>
-              <a:t>LaunchMinds  ·  From Assistant to Autonomous  ·  2026</a:t>
+              <a:t>LaunchMinds  ·  Built on Minds  ·  2026</a:t>
             </a:r>
           </a:p>
         </p:txBody>
@@ -6321,7 +6643,7 @@
                 </a:solidFill>
                 <a:latin typeface="Avenir Next"/>
               </a:rPr>
-              <a:t>Inline autocomplete</a:t>
+              <a:t>Inline suggestions, not action</a:t>
             </a:r>
           </a:p>
         </p:txBody>
@@ -6363,7 +6685,7 @@
                 </a:solidFill>
                 <a:latin typeface="Avenir Next"/>
               </a:rPr>
-              <a:t>—  Early Copilot-style tools</a:t>
+              <a:t>—  Suggestions only — human reviews every one</a:t>
             </a:r>
           </a:p>
           <a:p>
@@ -6382,26 +6704,7 @@
                 </a:solidFill>
                 <a:latin typeface="Avenir Next"/>
               </a:rPr>
-              <a:t>—  Human drives, AI suggests fragments</a:t>
-            </a:r>
-          </a:p>
-          <a:p>
-            <a:pPr>
-              <a:lnSpc>
-                <a:spcPct val="120000"/>
-              </a:lnSpc>
-              <a:spcAft>
-                <a:spcPts val="1200"/>
-              </a:spcAft>
-            </a:pPr>
-            <a:r>
-              <a:rPr sz="1450">
-                <a:solidFill>
-                  <a:srgbClr val="A6AFC2"/>
-                </a:solidFill>
-                <a:latin typeface="Avenir Next"/>
-              </a:rPr>
-              <a:t>—  Bounded to the next few lines</a:t>
+              <a:t>—  Human stays in control of the outcome</a:t>
             </a:r>
           </a:p>
         </p:txBody>
@@ -6530,7 +6833,7 @@
                 </a:solidFill>
                 <a:latin typeface="Avenir Next"/>
               </a:rPr>
-              <a:t>IN LAUNCHMINDS</a:t>
+              <a:t>ON MINDS, IN LAUNCHMINDS</a:t>
             </a:r>
           </a:p>
         </p:txBody>
@@ -6569,7 +6872,7 @@
                 </a:solidFill>
                 <a:latin typeface="Avenir Next"/>
               </a:rPr>
-              <a:t>AI-assisted campaign copy</a:t>
+              <a:t>Minds-assisted campaign drafting</a:t>
             </a:r>
           </a:p>
         </p:txBody>
@@ -6611,7 +6914,7 @@
                 </a:solidFill>
                 <a:latin typeface="Avenir Next"/>
               </a:rPr>
-              <a:t>—  AI helped write campaign copy &amp; task descriptions</a:t>
+              <a:t>—  Minds proposes structure, drafts copy</a:t>
             </a:r>
           </a:p>
           <a:p>
@@ -6630,7 +6933,7 @@
                 </a:solidFill>
                 <a:latin typeface="Avenir Next"/>
               </a:rPr>
-              <a:t>—  Human still designed and assembled the whole campaign</a:t>
+              <a:t>—  Pulls in context Harness has already stored</a:t>
             </a:r>
           </a:p>
           <a:p>
@@ -6649,7 +6952,7 @@
                 </a:solidFill>
                 <a:latin typeface="Avenir Next"/>
               </a:rPr>
-              <a:t>—  Useful, but narrow</a:t>
+              <a:t>—  Human in the loop at every step</a:t>
             </a:r>
           </a:p>
         </p:txBody>
@@ -6688,7 +6991,7 @@
                 </a:solidFill>
                 <a:latin typeface="Avenir Next"/>
               </a:rPr>
-              <a:t>This was our starting point — already behind us.</a:t>
+              <a:t>Already saving our team real hours today.</a:t>
             </a:r>
           </a:p>
         </p:txBody>
@@ -6727,7 +7030,7 @@
                 </a:solidFill>
                 <a:latin typeface="Avenir Next"/>
               </a:rPr>
-              <a:t>LaunchMinds  ·  From Assistant to Autonomous  ·  2026</a:t>
+              <a:t>LaunchMinds  ·  Built on Minds  ·  2026</a:t>
             </a:r>
           </a:p>
         </p:txBody>
@@ -7095,7 +7398,7 @@
                 </a:solidFill>
                 <a:latin typeface="Avenir Next"/>
               </a:rPr>
-              <a:t>One session, full execution</a:t>
+              <a:t>Full task, one sitting, human watching</a:t>
             </a:r>
           </a:p>
         </p:txBody>
@@ -7137,7 +7440,7 @@
                 </a:solidFill>
                 <a:latin typeface="Avenir Next"/>
               </a:rPr>
-              <a:t>—  A full brief goes in, one LLM session executes it end-to-end</a:t>
+              <a:t>—  One session completes an entire task</a:t>
             </a:r>
           </a:p>
           <a:p>
@@ -7156,7 +7459,7 @@
                 </a:solidFill>
                 <a:latin typeface="Avenir Next"/>
               </a:rPr>
-              <a:t>—  Bounded to one continuous session, one thread</a:t>
+              <a:t>—  A human observes, doesn't drive step by step</a:t>
             </a:r>
           </a:p>
         </p:txBody>
@@ -7285,7 +7588,7 @@
                 </a:solidFill>
                 <a:latin typeface="Avenir Next"/>
               </a:rPr>
-              <a:t>IN LAUNCHMINDS</a:t>
+              <a:t>ON MINDS, IN LAUNCHMINDS</a:t>
             </a:r>
           </a:p>
         </p:txBody>
@@ -7324,7 +7627,7 @@
                 </a:solidFill>
                 <a:latin typeface="Avenir Next"/>
               </a:rPr>
-              <a:t>Registration → Plan → Deploy, in one pass</a:t>
+              <a:t>One session, one Mind, full pipeline</a:t>
             </a:r>
           </a:p>
         </p:txBody>
@@ -7366,7 +7669,7 @@
                 </a:solidFill>
                 <a:latin typeface="Avenir Next"/>
               </a:rPr>
-              <a:t>—  One session handles registration, strategy planning, AND deployment</a:t>
+              <a:t>—  Registration + planning + deployment — no handoffs between tools</a:t>
             </a:r>
           </a:p>
           <a:p>
@@ -7385,7 +7688,7 @@
                 </a:solidFill>
                 <a:latin typeface="Avenir Next"/>
               </a:rPr>
-              <a:t>—  Powered by our internal skill system — encodes the full campaign schema</a:t>
+              <a:t>—  Runs on our internal skill system: structured capabilities we hand to Minds so it can act, not just suggest</a:t>
             </a:r>
           </a:p>
           <a:p>
@@ -7404,7 +7707,7 @@
                 </a:solidFill>
                 <a:latin typeface="Avenir Next"/>
               </a:rPr>
-              <a:t>—  Brief in, live campaign out — shipped and working today</a:t>
+              <a:t>—  Minds doing real autonomous work within a session — live in production today</a:t>
             </a:r>
           </a:p>
         </p:txBody>
@@ -7443,7 +7746,7 @@
                 </a:solidFill>
                 <a:latin typeface="Avenir Next"/>
               </a:rPr>
-              <a:t>This is real. This is where LaunchMinds stands right now.</a:t>
+              <a:t>The first stage where Minds truly acts, not just assists.</a:t>
             </a:r>
           </a:p>
         </p:txBody>
@@ -7482,7 +7785,7 @@
                 </a:solidFill>
                 <a:latin typeface="Avenir Next"/>
               </a:rPr>
-              <a:t>LaunchMinds  ·  From Assistant to Autonomous  ·  2026</a:t>
+              <a:t>LaunchMinds  ·  Built on Minds  ·  2026</a:t>
             </a:r>
           </a:p>
         </p:txBody>
@@ -7850,7 +8153,7 @@
                 </a:solidFill>
                 <a:latin typeface="Avenir Next"/>
               </a:rPr>
-              <a:t>Persistent, multi-agent systems</a:t>
+              <a:t>Long-running, autonomous, self-checking</a:t>
             </a:r>
           </a:p>
         </p:txBody>
@@ -7892,7 +8195,7 @@
                 </a:solidFill>
                 <a:latin typeface="Avenir Next"/>
               </a:rPr>
-              <a:t>—  Not one bounded session — a persistent system</a:t>
+              <a:t>—  Not one session — a persistent, ongoing system</a:t>
             </a:r>
           </a:p>
           <a:p>
@@ -7911,26 +8214,7 @@
                 </a:solidFill>
                 <a:latin typeface="Avenir Next"/>
               </a:rPr>
-              <a:t>—  Multiple agents, each with a role</a:t>
-            </a:r>
-          </a:p>
-          <a:p>
-            <a:pPr>
-              <a:lnSpc>
-                <a:spcPct val="120000"/>
-              </a:lnSpc>
-              <a:spcAft>
-                <a:spcPts val="1200"/>
-              </a:spcAft>
-            </a:pPr>
-            <a:r>
-              <a:rPr sz="1450">
-                <a:solidFill>
-                  <a:srgbClr val="A6AFC2"/>
-                </a:solidFill>
-                <a:latin typeface="Avenir Next"/>
-              </a:rPr>
-              <a:t>—  Coordinate with each other over time</a:t>
+              <a:t>—  Checks and corrects its own work over time</a:t>
             </a:r>
           </a:p>
         </p:txBody>
@@ -8059,7 +8343,7 @@
                 </a:solidFill>
                 <a:latin typeface="Avenir Next"/>
               </a:rPr>
-              <a:t>IN LAUNCHMINDS</a:t>
+              <a:t>ON MINDS, IN LAUNCHMINDS</a:t>
             </a:r>
           </a:p>
         </p:txBody>
@@ -8098,7 +8382,7 @@
                 </a:solidFill>
                 <a:latin typeface="Avenir Next"/>
               </a:rPr>
-              <a:t>A workspace per project, seeded by Harness</a:t>
+              <a:t>A workspace of multiple Minds instances</a:t>
             </a:r>
           </a:p>
         </p:txBody>
@@ -8140,7 +8424,7 @@
                 </a:solidFill>
                 <a:latin typeface="Avenir Next"/>
               </a:rPr>
-              <a:t>—  Persistent workspace for every project / brand</a:t>
+              <a:t>—  Per-project workspace: one Mind plans, one executes, one analyzes, one adjusts</a:t>
             </a:r>
           </a:p>
           <a:p>
@@ -8159,7 +8443,7 @@
                 </a:solidFill>
                 <a:latin typeface="Avenir Next"/>
               </a:rPr>
-              <a:t>—  Multiple “Minds” divide the labor: plan, execute, analyze, adjust</a:t>
+              <a:t>—  Not roles loosely called “Minds” — literal Minds models, coordinating in a loop</a:t>
             </a:r>
           </a:p>
           <a:p>
@@ -8178,7 +8462,7 @@
                 </a:solidFill>
                 <a:latin typeface="Avenir Next"/>
               </a:rPr>
-              <a:t>—  A continuous, self-improving loop — not one-shot</a:t>
+              <a:t>—  Where we push toward real multi-agent coordination on your platform</a:t>
             </a:r>
           </a:p>
         </p:txBody>
@@ -8217,7 +8501,7 @@
                 </a:solidFill>
                 <a:latin typeface="Avenir Next"/>
               </a:rPr>
-              <a:t>The milestone we're now chasing.</a:t>
+              <a:t>The clearest place you'll see what your platform makes possible.</a:t>
             </a:r>
           </a:p>
         </p:txBody>
@@ -8256,7 +8540,7 @@
                 </a:solidFill>
                 <a:latin typeface="Avenir Next"/>
               </a:rPr>
-              <a:t>LaunchMinds  ·  From Assistant to Autonomous  ·  2026</a:t>
+              <a:t>LaunchMinds  ·  Built on Minds  ·  2026</a:t>
             </a:r>
           </a:p>
         </p:txBody>
@@ -8365,7 +8649,7 @@
                 </a:solidFill>
                 <a:latin typeface="Avenir Next"/>
               </a:rPr>
-              <a:t>PARTNERSHIP</a:t>
+              <a:t>EXPLORING</a:t>
             </a:r>
           </a:p>
         </p:txBody>
@@ -8443,7 +8727,7 @@
                 </a:solidFill>
                 <a:latin typeface="Avenir Next"/>
               </a:rPr>
-              <a:t>Raising the bar on analysis</a:t>
+              <a:t>One open thread: Sapien</a:t>
             </a:r>
           </a:p>
         </p:txBody>
@@ -8542,7 +8826,7 @@
                 </a:solidFill>
                 <a:latin typeface="Avenir Next"/>
               </a:rPr>
-              <a:t>—  The “analyze” Mind is only as good as its rigor</a:t>
+              <a:t>—  Early conversations, not finalized</a:t>
             </a:r>
           </a:p>
           <a:p>
@@ -8561,7 +8845,7 @@
                 </a:solidFill>
                 <a:latin typeface="Avenir Next"/>
               </a:rPr>
-              <a:t>—  We're exploring a collaboration with Sapien</a:t>
+              <a:t>—  Potential collaboration on the “analyze” step of the Stage 3 loop</a:t>
             </a:r>
           </a:p>
           <a:p>
@@ -8580,7 +8864,7 @@
                 </a:solidFill>
                 <a:latin typeface="Avenir Next"/>
               </a:rPr>
-              <a:t>—  Goal: combine forces for the most professional, rigorous marketing analysis possible</a:t>
+              <a:t>—  Evaluating whether their approach complements what Minds already gives us</a:t>
             </a:r>
           </a:p>
           <a:p>
@@ -8599,7 +8883,7 @@
                 </a:solidFill>
                 <a:latin typeface="Avenir Next"/>
               </a:rPr>
-              <a:t>—  Active conversation — not yet finalized</a:t>
+              <a:t>—  Full transparency: exploration, not a commitment</a:t>
             </a:r>
           </a:p>
         </p:txBody>
@@ -8638,7 +8922,7 @@
                 </a:solidFill>
                 <a:latin typeface="Avenir Next"/>
               </a:rPr>
-              <a:t>LaunchMinds  ·  From Assistant to Autonomous  ·  2026</a:t>
+              <a:t>LaunchMinds  ·  Built on Minds  ·  2026</a:t>
             </a:r>
           </a:p>
         </p:txBody>
@@ -8747,7 +9031,7 @@
                 </a:solidFill>
                 <a:latin typeface="Avenir Next"/>
               </a:rPr>
-              <a:t>WHERE THIS IS GOING</a:t>
+              <a:t>WHERE THIS GOES</a:t>
             </a:r>
           </a:p>
         </p:txBody>
@@ -8819,13 +9103,13 @@
               </a:lnSpc>
             </a:pPr>
             <a:r>
-              <a:rPr sz="3600" b="1" i="0">
+              <a:rPr sz="3200" b="1" i="0">
                 <a:solidFill>
                   <a:srgbClr val="F2F4F8"/>
                 </a:solidFill>
                 <a:latin typeface="Avenir Next"/>
               </a:rPr>
-              <a:t>Built. Shipping. Building next.</a:t>
+              <a:t>Built on Minds — with Minds' community</a:t>
             </a:r>
           </a:p>
         </p:txBody>
@@ -8838,7 +9122,7 @@
         </p:nvSpPr>
         <p:spPr>
           <a:xfrm>
-            <a:off x="502920" y="1920240"/>
+            <a:off x="502920" y="1828800"/>
             <a:ext cx="3337560" cy="1554480"/>
           </a:xfrm>
           <a:prstGeom prst="roundRect">
@@ -8884,7 +9168,7 @@
         </p:nvSpPr>
         <p:spPr>
           <a:xfrm>
-            <a:off x="502920" y="1920240"/>
+            <a:off x="502920" y="1828800"/>
             <a:ext cx="3337560" cy="64008"/>
           </a:xfrm>
           <a:prstGeom prst="rect">
@@ -8928,7 +9212,7 @@
         </p:nvSpPr>
         <p:spPr>
           <a:xfrm>
-            <a:off x="777240" y="2148840"/>
+            <a:off x="777240" y="2057400"/>
             <a:ext cx="2788920" cy="365760"/>
           </a:xfrm>
           <a:prstGeom prst="rect">
@@ -8967,7 +9251,7 @@
         </p:nvSpPr>
         <p:spPr>
           <a:xfrm>
-            <a:off x="777240" y="2514600"/>
+            <a:off x="777240" y="2423160"/>
             <a:ext cx="2788920" cy="548640"/>
           </a:xfrm>
           <a:prstGeom prst="rect">
@@ -8993,7 +9277,7 @@
                 </a:solidFill>
                 <a:latin typeface="Avenir Next"/>
               </a:rPr>
-              <a:t>Content assistance</a:t>
+              <a:t>Minds-assisted drafting</a:t>
             </a:r>
           </a:p>
         </p:txBody>
@@ -9006,7 +9290,7 @@
         </p:nvSpPr>
         <p:spPr>
           <a:xfrm>
-            <a:off x="777240" y="3063240"/>
+            <a:off x="777240" y="2971800"/>
             <a:ext cx="1042416" cy="292608"/>
           </a:xfrm>
           <a:prstGeom prst="roundRect">
@@ -9063,7 +9347,7 @@
         </p:nvSpPr>
         <p:spPr>
           <a:xfrm>
-            <a:off x="4343400" y="1920240"/>
+            <a:off x="4343400" y="1828800"/>
             <a:ext cx="3337560" cy="1554480"/>
           </a:xfrm>
           <a:prstGeom prst="roundRect">
@@ -9109,7 +9393,7 @@
         </p:nvSpPr>
         <p:spPr>
           <a:xfrm>
-            <a:off x="4343400" y="1920240"/>
+            <a:off x="4343400" y="1828800"/>
             <a:ext cx="3337560" cy="64008"/>
           </a:xfrm>
           <a:prstGeom prst="rect">
@@ -9153,7 +9437,7 @@
         </p:nvSpPr>
         <p:spPr>
           <a:xfrm>
-            <a:off x="4617720" y="2148840"/>
+            <a:off x="4617720" y="2057400"/>
             <a:ext cx="2788920" cy="365760"/>
           </a:xfrm>
           <a:prstGeom prst="rect">
@@ -9192,7 +9476,7 @@
         </p:nvSpPr>
         <p:spPr>
           <a:xfrm>
-            <a:off x="4617720" y="2514600"/>
+            <a:off x="4617720" y="2423160"/>
             <a:ext cx="2788920" cy="548640"/>
           </a:xfrm>
           <a:prstGeom prst="rect">
@@ -9218,7 +9502,7 @@
                 </a:solidFill>
                 <a:latin typeface="Avenir Next"/>
               </a:rPr>
-              <a:t>Single-session execution</a:t>
+              <a:t>One Mind, full session</a:t>
             </a:r>
           </a:p>
         </p:txBody>
@@ -9231,7 +9515,7 @@
         </p:nvSpPr>
         <p:spPr>
           <a:xfrm>
-            <a:off x="4617720" y="3063240"/>
+            <a:off x="4617720" y="2971800"/>
             <a:ext cx="1188720" cy="292608"/>
           </a:xfrm>
           <a:prstGeom prst="roundRect">
@@ -9288,7 +9572,7 @@
         </p:nvSpPr>
         <p:spPr>
           <a:xfrm>
-            <a:off x="8183879" y="1920240"/>
+            <a:off x="8183879" y="1828800"/>
             <a:ext cx="3337560" cy="1554480"/>
           </a:xfrm>
           <a:prstGeom prst="roundRect">
@@ -9334,7 +9618,7 @@
         </p:nvSpPr>
         <p:spPr>
           <a:xfrm>
-            <a:off x="8183879" y="1920240"/>
+            <a:off x="8183879" y="1828800"/>
             <a:ext cx="3337560" cy="64008"/>
           </a:xfrm>
           <a:prstGeom prst="rect">
@@ -9378,7 +9662,7 @@
         </p:nvSpPr>
         <p:spPr>
           <a:xfrm>
-            <a:off x="8458199" y="2148840"/>
+            <a:off x="8458199" y="2057400"/>
             <a:ext cx="2788920" cy="365760"/>
           </a:xfrm>
           <a:prstGeom prst="rect">
@@ -9417,7 +9701,7 @@
         </p:nvSpPr>
         <p:spPr>
           <a:xfrm>
-            <a:off x="8458199" y="2514600"/>
+            <a:off x="8458199" y="2423160"/>
             <a:ext cx="2788920" cy="548640"/>
           </a:xfrm>
           <a:prstGeom prst="rect">
@@ -9443,7 +9727,7 @@
                 </a:solidFill>
                 <a:latin typeface="Avenir Next"/>
               </a:rPr>
-              <a:t>Agent mode workspace</a:t>
+              <a:t>Multi-Mind workspace</a:t>
             </a:r>
           </a:p>
         </p:txBody>
@@ -9456,7 +9740,7 @@
         </p:nvSpPr>
         <p:spPr>
           <a:xfrm>
-            <a:off x="8458199" y="3063240"/>
+            <a:off x="8458199" y="2971800"/>
             <a:ext cx="1042416" cy="292608"/>
           </a:xfrm>
           <a:prstGeom prst="roundRect">
@@ -9513,8 +9797,8 @@
         </p:nvSpPr>
         <p:spPr>
           <a:xfrm>
-            <a:off x="502920" y="3886200"/>
-            <a:ext cx="11155680" cy="914400"/>
+            <a:off x="502920" y="3657600"/>
+            <a:ext cx="11155680" cy="822960"/>
           </a:xfrm>
           <a:prstGeom prst="rect">
             <a:avLst/>
@@ -9533,13 +9817,13 @@
               </a:lnSpc>
             </a:pPr>
             <a:r>
-              <a:rPr sz="2100" b="0" i="1">
+              <a:rPr sz="1900" b="0" i="1">
                 <a:solidFill>
                   <a:srgbClr val="5EE6C0"/>
                 </a:solidFill>
                 <a:latin typeface="Avenir Next"/>
               </a:rPr>
-              <a:t>Structured, actionable workflows → scalable user growth, real brand impact.</a:t>
+              <a:t>Not an integration bolted on after the fact — built on Minds from day one.</a:t>
             </a:r>
           </a:p>
         </p:txBody>
@@ -9552,8 +9836,8 @@
         </p:nvSpPr>
         <p:spPr>
           <a:xfrm>
-            <a:off x="502920" y="4892040"/>
-            <a:ext cx="11155680" cy="1188720"/>
+            <a:off x="502920" y="4434840"/>
+            <a:ext cx="11155680" cy="1280160"/>
           </a:xfrm>
           <a:prstGeom prst="rect">
             <a:avLst/>
@@ -9568,17 +9852,33 @@
           <a:p>
             <a:pPr algn="l">
               <a:lnSpc>
-                <a:spcPct val="115000"/>
-              </a:lnSpc>
-            </a:pPr>
-            <a:r>
-              <a:rPr sz="2600" b="1" i="0">
+                <a:spcPct val="120000"/>
+              </a:lnSpc>
+            </a:pPr>
+            <a:r>
+              <a:rPr sz="2500" b="1" i="0">
                 <a:solidFill>
                   <a:srgbClr val="F2F4F8"/>
                 </a:solidFill>
                 <a:latin typeface="Avenir Next"/>
               </a:rPr>
-              <a:t>We've built the first two stages. Now we're building the third.</a:t>
+              <a:t>What gets built on top of a platform is the best answer</a:t>
+            </a:r>
+          </a:p>
+          <a:p>
+            <a:pPr algn="l">
+              <a:lnSpc>
+                <a:spcPct val="120000"/>
+              </a:lnSpc>
+            </a:pPr>
+            <a:r>
+              <a:rPr sz="2500" b="1" i="0">
+                <a:solidFill>
+                  <a:srgbClr val="F2F4F8"/>
+                </a:solidFill>
+                <a:latin typeface="Avenir Next"/>
+              </a:rPr>
+              <a:t>a platform can have.</a:t>
             </a:r>
           </a:p>
         </p:txBody>
@@ -9591,8 +9891,8 @@
         </p:nvSpPr>
         <p:spPr>
           <a:xfrm>
-            <a:off x="502920" y="5806440"/>
-            <a:ext cx="5486400" cy="457200"/>
+            <a:off x="502920" y="5623560"/>
+            <a:ext cx="10515600" cy="548640"/>
           </a:xfrm>
           <a:prstGeom prst="rect">
             <a:avLst/>
@@ -9611,12 +9911,51 @@
               </a:lnSpc>
             </a:pPr>
             <a:r>
-              <a:rPr sz="1800" b="0" i="1">
+              <a:rPr sz="1550" b="0" i="1">
                 <a:solidFill>
                   <a:srgbClr val="A6AFC2"/>
                 </a:solidFill>
                 <a:latin typeface="Avenir Next"/>
               </a:rPr>
+              <a:t>We'd like to keep building that answer together — with your platform, and with your community.</a:t>
+            </a:r>
+          </a:p>
+        </p:txBody>
+      </p:sp>
+      <p:sp>
+        <p:nvSpPr>
+          <p:cNvPr id="24" name="TextBox 23"/>
+          <p:cNvSpPr txBox="1"/>
+          <p:nvPr/>
+        </p:nvSpPr>
+        <p:spPr>
+          <a:xfrm>
+            <a:off x="502920" y="6144768"/>
+            <a:ext cx="5486400" cy="365760"/>
+          </a:xfrm>
+          <a:prstGeom prst="rect">
+            <a:avLst/>
+          </a:prstGeom>
+          <a:noFill/>
+        </p:spPr>
+        <p:txBody>
+          <a:bodyPr wrap="square" anchor="t">
+            <a:spAutoFit/>
+          </a:bodyPr>
+          <a:lstStyle/>
+          <a:p>
+            <a:pPr algn="l">
+              <a:lnSpc>
+                <a:spcPct val="115000"/>
+              </a:lnSpc>
+            </a:pPr>
+            <a:r>
+              <a:rPr sz="1600" b="0" i="1">
+                <a:solidFill>
+                  <a:srgbClr val="A6AFC2"/>
+                </a:solidFill>
+                <a:latin typeface="Avenir Next"/>
+              </a:rPr>
               <a:t>Thank you.</a:t>
             </a:r>
           </a:p>
@@ -9624,7 +9963,7 @@
       </p:sp>
       <p:sp>
         <p:nvSpPr>
-          <p:cNvPr id="24" name="TextBox 23"/>
+          <p:cNvPr id="25" name="TextBox 24"/>
           <p:cNvSpPr txBox="1"/>
           <p:nvPr/>
         </p:nvSpPr>

--- a/presentations/launchminds-agent-evolution-2026-08/launchminds-deck.pptx
+++ b/presentations/launchminds-agent-evolution-2026-08/launchminds-deck.pptx
@@ -510,7 +510,7 @@
           <a:lstStyle/>
           <a:p>
             <a:r>
-              <a:t>Good [morning/afternoon] — I'm here to show you what we've built on top of Minds. Our name isn't an accident: Launch, plus Minds. We picked it because Minds is the foundation everything we do stands on — the same role Claude or GPT-4 plays for other companies, Minds plays for us. What you'll see today is proof of what that foundation makes possible, and where we want to take it next, together.</a:t>
+              <a:t>Good [morning/afternoon] — today I want to walk you through how LaunchMinds is evolving, from an assistant to something increasingly autonomous, and what that's been like to build on Minds. Our name isn't an accident: Launch, plus Minds. We picked it because Minds is the foundation everything we do stands on — the same role Claude or GPT-4 plays for other companies, Minds plays for us. What you'll see today is proof of what that foundation makes possible, and where we want to take it next, together.</a:t>
             </a:r>
           </a:p>
         </p:txBody>
@@ -4201,7 +4201,7 @@
                 </a:solidFill>
                 <a:latin typeface="Avenir Next"/>
               </a:rPr>
-              <a:t>Built on Minds,</a:t>
+              <a:t>From Assistant</a:t>
             </a:r>
           </a:p>
           <a:p>
@@ -4217,7 +4217,7 @@
                 </a:solidFill>
                 <a:latin typeface="Avenir Next"/>
               </a:rPr>
-              <a:t>From Day One</a:t>
+              <a:t>to Autonomous</a:t>
             </a:r>
           </a:p>
         </p:txBody>
@@ -4256,7 +4256,7 @@
                 </a:solidFill>
                 <a:latin typeface="Avenir Next"/>
               </a:rPr>
-              <a:t>Powered by Minds, built with Harness.</a:t>
+              <a:t>Built on Minds, from day one.</a:t>
             </a:r>
           </a:p>
         </p:txBody>

--- a/presentations/launchminds-agent-evolution-2026-08/launchminds-deck.pptx
+++ b/presentations/launchminds-agent-evolution-2026-08/launchminds-deck.pptx
@@ -13,7 +13,6 @@
     <p:sldId id="261" r:id="rId13"/>
     <p:sldId id="262" r:id="rId14"/>
     <p:sldId id="263" r:id="rId15"/>
-    <p:sldId id="264" r:id="rId16"/>
   </p:sldIdLst>
   <p:sldSz cx="12191695" cy="6858000" type="screen4x3"/>
   <p:notesSz cx="6858000" cy="9144000"/>
@@ -860,7 +859,7 @@
           <a:lstStyle/>
           <a:p>
             <a:r>
-              <a:t>Stage two is what's running in production right now. One session, one Mind, handling registration, planning, and deployment end to end — no handoffs between tools. It runs through our internal skill system, which is essentially a set of structured capabilities we hand to Minds so it can act, not just suggest. This is the first stage where Minds does real work autonomously within a session, and it's in daily use today.</a:t>
+              <a:t>Stage two is what's live right now. One session, one Mind, handling registration, planning, and deployment end to end — no handoffs between tools. It runs through our internal skill system, which is essentially a set of structured capabilities we hand to Minds so it can act, not just suggest. This is the first stage where Minds does real work autonomously within a session.</a:t>
             </a:r>
           </a:p>
         </p:txBody>
@@ -930,7 +929,7 @@
           <a:lstStyle/>
           <a:p>
             <a:r>
-              <a:t>Stage three is our next milestone, and it's the part I think matters most for this room. We're building a per-project workspace where multiple Minds instances run side by side — one planning, one executing, one analyzing results, one adjusting the plan based on what it sees — coordinating with each other in a continuous loop. These aren't roles we're loosely calling 'Minds.' They're literal Minds models, each doing a distinct job, talking to each other. This is the clearest place you'll see what your platform makes possible when we push it toward real multi-agent coordination.</a:t>
+              <a:t>Stage three is our next milestone, and it's the part I think matters most for this room. We're building a per-project workspace where multiple Minds instances coordinate with each other — thinking through strategy, executing it, reading the results, and adjusting together. We're not locking that into a fixed pipeline of roles; the shape of that group adapts to what each campaign actually needs. This is the clearest place you'll see what your platform makes possible when we push it toward real multi-agent coordination.</a:t>
             </a:r>
           </a:p>
         </p:txBody>
@@ -1000,77 +999,7 @@
           <a:lstStyle/>
           <a:p>
             <a:r>
-              <a:t>One open thread, for full transparency: we're in early conversations with Sapien about the analyze step in that stage-three loop — whether their approach complements what Minds already gives us. To be clear, this is exploration, not a commitment. We want to be upfront about what's decided and what's still being evaluated, because that honesty is part of how we want to build this relationship with you.</a:t>
-            </a:r>
-          </a:p>
-        </p:txBody>
-      </p:sp>
-      <p:sp>
-        <p:nvSpPr>
-          <p:cNvPr id="4" name="Slide Number Placeholder 3"/>
-          <p:cNvSpPr>
-            <a:spLocks noGrp="1"/>
-          </p:cNvSpPr>
-          <p:nvPr>
-            <p:ph type="sldNum" idx="5" sz="quarter"/>
-          </p:nvPr>
-        </p:nvSpPr>
-        <p:spPr/>
-      </p:sp>
-    </p:spTree>
-  </p:cSld>
-  <p:clrMapOvr>
-    <a:masterClrMapping/>
-  </p:clrMapOvr>
-</p:notes>
-</file>
-
-<file path=ppt/notesSlides/notesSlide9.xml><?xml version="1.0" encoding="utf-8"?>
-<p:notes xmlns:a="http://schemas.openxmlformats.org/drawingml/2006/main" xmlns:p="http://schemas.openxmlformats.org/presentationml/2006/main" xmlns:r="http://schemas.openxmlformats.org/officeDocument/2006/relationships">
-  <p:cSld>
-    <p:spTree>
-      <p:nvGrpSpPr>
-        <p:cNvPr id="1" name=""/>
-        <p:cNvGrpSpPr/>
-        <p:nvPr/>
-      </p:nvGrpSpPr>
-      <p:grpSpPr>
-        <a:xfrm>
-          <a:off x="0" y="0"/>
-          <a:ext cx="0" cy="0"/>
-          <a:chOff x="0" y="0"/>
-          <a:chExt cx="0" cy="0"/>
-        </a:xfrm>
-      </p:grpSpPr>
-      <p:sp>
-        <p:nvSpPr>
-          <p:cNvPr id="2" name="Slide Image Placeholder 1"/>
-          <p:cNvSpPr>
-            <a:spLocks noGrp="1"/>
-          </p:cNvSpPr>
-          <p:nvPr>
-            <p:ph type="sldImg" idx="2"/>
-          </p:nvPr>
-        </p:nvSpPr>
-        <p:spPr/>
-      </p:sp>
-      <p:sp>
-        <p:nvSpPr>
-          <p:cNvPr id="3" name="Notes Placeholder 2"/>
-          <p:cNvSpPr>
-            <a:spLocks noGrp="1"/>
-          </p:cNvSpPr>
-          <p:nvPr>
-            <p:ph type="body" idx="3" sz="quarter"/>
-          </p:nvPr>
-        </p:nvSpPr>
-        <p:spPr/>
-        <p:txBody>
-          <a:bodyPr/>
-          <a:lstStyle/>
-          <a:p>
-            <a:r>
-              <a:t>So: two stages shipped and running, one stage actively in motion, built on Minds from day one — not as an integration bolted on after the fact, but as the foundation. We're showing you this because we think it's a good answer to the question every platform has to answer eventually: what gets built on top of us? We'd like to keep building that answer together — with your platform, and with your community. Thanks for the time.</a:t>
+              <a:t>So: two stages built and live today, one stage actively in motion, built on Minds from day one — not as an integration bolted on after the fact, but as the foundation. We're showing you this because we think it's a good answer to the question every platform has to answer eventually: what gets built on top of us? We'd like to keep building that answer together — with your platform, and with your community. Thanks for the time.</a:t>
             </a:r>
           </a:p>
         </p:txBody>
@@ -4523,7 +4452,7 @@
                 </a:solidFill>
                 <a:latin typeface="Avenir Next"/>
               </a:rPr>
-              <a:t>01 / 08</a:t>
+              <a:t>01 / 07</a:t>
             </a:r>
           </a:p>
         </p:txBody>
@@ -4864,7 +4793,7 @@
                 </a:solidFill>
                 <a:latin typeface="Avenir Next"/>
               </a:rPr>
-              <a:t>02 / 08</a:t>
+              <a:t>02 / 07</a:t>
             </a:r>
           </a:p>
         </p:txBody>
@@ -5605,7 +5534,7 @@
                 </a:solidFill>
                 <a:latin typeface="Avenir Next"/>
               </a:rPr>
-              <a:t>03 / 08</a:t>
+              <a:t>03 / 07</a:t>
             </a:r>
           </a:p>
         </p:txBody>
@@ -6423,7 +6352,7 @@
                 </a:solidFill>
                 <a:latin typeface="Avenir Next"/>
               </a:rPr>
-              <a:t>04 / 08</a:t>
+              <a:t>04 / 07</a:t>
             </a:r>
           </a:p>
         </p:txBody>
@@ -7178,7 +7107,7 @@
                 </a:solidFill>
                 <a:latin typeface="Avenir Next"/>
               </a:rPr>
-              <a:t>05 / 08</a:t>
+              <a:t>05 / 07</a:t>
             </a:r>
           </a:p>
         </p:txBody>
@@ -7707,7 +7636,7 @@
                 </a:solidFill>
                 <a:latin typeface="Avenir Next"/>
               </a:rPr>
-              <a:t>—  Minds doing real autonomous work within a session — live in production today</a:t>
+              <a:t>—  Minds doing real autonomous work within a session</a:t>
             </a:r>
           </a:p>
         </p:txBody>
@@ -7933,7 +7862,7 @@
                 </a:solidFill>
                 <a:latin typeface="Avenir Next"/>
               </a:rPr>
-              <a:t>06 / 08</a:t>
+              <a:t>06 / 07</a:t>
             </a:r>
           </a:p>
         </p:txBody>
@@ -8382,7 +8311,7 @@
                 </a:solidFill>
                 <a:latin typeface="Avenir Next"/>
               </a:rPr>
-              <a:t>A workspace of multiple Minds instances</a:t>
+              <a:t>A workspace of coordinating Minds</a:t>
             </a:r>
           </a:p>
         </p:txBody>
@@ -8424,7 +8353,7 @@
                 </a:solidFill>
                 <a:latin typeface="Avenir Next"/>
               </a:rPr>
-              <a:t>—  Per-project workspace: one Mind plans, one executes, one analyzes, one adjusts</a:t>
+              <a:t>—  Per-project workspace: multiple Minds instances coordinating</a:t>
             </a:r>
           </a:p>
           <a:p>
@@ -8443,7 +8372,7 @@
                 </a:solidFill>
                 <a:latin typeface="Avenir Next"/>
               </a:rPr>
-              <a:t>—  Not roles loosely called “Minds” — literal Minds models, coordinating in a loop</a:t>
+              <a:t>—  No fixed pipeline of roles — the group's shape adapts to what the campaign needs</a:t>
             </a:r>
           </a:p>
           <a:p>
@@ -8649,7 +8578,7 @@
                 </a:solidFill>
                 <a:latin typeface="Avenir Next"/>
               </a:rPr>
-              <a:t>EXPLORING</a:t>
+              <a:t>WHERE THIS GOES</a:t>
             </a:r>
           </a:p>
         </p:txBody>
@@ -8688,389 +8617,7 @@
                 </a:solidFill>
                 <a:latin typeface="Avenir Next"/>
               </a:rPr>
-              <a:t>07 / 08</a:t>
-            </a:r>
-          </a:p>
-        </p:txBody>
-      </p:sp>
-      <p:sp>
-        <p:nvSpPr>
-          <p:cNvPr id="5" name="TextBox 4"/>
-          <p:cNvSpPr txBox="1"/>
-          <p:nvPr/>
-        </p:nvSpPr>
-        <p:spPr>
-          <a:xfrm>
-            <a:off x="502920" y="960120"/>
-            <a:ext cx="10515600" cy="640080"/>
-          </a:xfrm>
-          <a:prstGeom prst="rect">
-            <a:avLst/>
-          </a:prstGeom>
-          <a:noFill/>
-        </p:spPr>
-        <p:txBody>
-          <a:bodyPr wrap="square" anchor="t">
-            <a:spAutoFit/>
-          </a:bodyPr>
-          <a:lstStyle/>
-          <a:p>
-            <a:pPr algn="l">
-              <a:lnSpc>
-                <a:spcPct val="115000"/>
-              </a:lnSpc>
-            </a:pPr>
-            <a:r>
-              <a:rPr sz="3600" b="1" i="0">
-                <a:solidFill>
-                  <a:srgbClr val="F2F4F8"/>
-                </a:solidFill>
-                <a:latin typeface="Avenir Next"/>
-              </a:rPr>
-              <a:t>One open thread: Sapien</a:t>
-            </a:r>
-          </a:p>
-        </p:txBody>
-      </p:sp>
-      <p:sp>
-        <p:nvSpPr>
-          <p:cNvPr id="6" name="Rounded Rectangle 5"/>
-          <p:cNvSpPr/>
-          <p:nvPr/>
-        </p:nvSpPr>
-        <p:spPr>
-          <a:xfrm>
-            <a:off x="502920" y="1783080"/>
-            <a:ext cx="3822191" cy="292608"/>
-          </a:xfrm>
-          <a:prstGeom prst="roundRect">
-            <a:avLst>
-              <a:gd name="adj" fmla="val 50000"/>
-            </a:avLst>
-          </a:prstGeom>
-          <a:solidFill>
-            <a:srgbClr val="0B0F1A"/>
-          </a:solidFill>
-          <a:ln w="12700">
-            <a:solidFill>
-              <a:srgbClr val="FFB46C"/>
-            </a:solidFill>
-          </a:ln>
-          <a:effectLst/>
-        </p:spPr>
-        <p:style>
-          <a:lnRef idx="1">
-            <a:schemeClr val="accent1"/>
-          </a:lnRef>
-          <a:fillRef idx="3">
-            <a:schemeClr val="accent1"/>
-          </a:fillRef>
-          <a:effectRef idx="2">
-            <a:schemeClr val="accent1"/>
-          </a:effectRef>
-          <a:fontRef idx="minor">
-            <a:schemeClr val="lt1"/>
-          </a:fontRef>
-        </p:style>
-        <p:txBody>
-          <a:bodyPr rtlCol="0" anchor="ctr" wrap="none" lIns="25400" rIns="25400" tIns="0" bIns="0"/>
-          <a:lstStyle/>
-          <a:p>
-            <a:pPr algn="ctr"/>
-            <a:r>
-              <a:rPr sz="1100" b="1">
-                <a:solidFill>
-                  <a:srgbClr val="FFB46C"/>
-                </a:solidFill>
-                <a:latin typeface="Avenir Next"/>
-              </a:rPr>
-              <a:t>EXPLORING · EARLY STAGE</a:t>
-            </a:r>
-          </a:p>
-        </p:txBody>
-      </p:sp>
-      <p:sp>
-        <p:nvSpPr>
-          <p:cNvPr id="7" name="TextBox 6"/>
-          <p:cNvSpPr txBox="1"/>
-          <p:nvPr/>
-        </p:nvSpPr>
-        <p:spPr>
-          <a:xfrm>
-            <a:off x="502920" y="2331720"/>
-            <a:ext cx="10515600" cy="2377440"/>
-          </a:xfrm>
-          <a:prstGeom prst="rect">
-            <a:avLst/>
-          </a:prstGeom>
-          <a:noFill/>
-        </p:spPr>
-        <p:txBody>
-          <a:bodyPr wrap="square">
-            <a:spAutoFit/>
-          </a:bodyPr>
-          <a:lstStyle/>
-          <a:p>
-            <a:pPr>
-              <a:lnSpc>
-                <a:spcPct val="120000"/>
-              </a:lnSpc>
-              <a:spcAft>
-                <a:spcPts val="1800"/>
-              </a:spcAft>
-            </a:pPr>
-            <a:r>
-              <a:rPr sz="1900">
-                <a:solidFill>
-                  <a:srgbClr val="F2F4F8"/>
-                </a:solidFill>
-                <a:latin typeface="Avenir Next"/>
-              </a:rPr>
-              <a:t>—  Early conversations, not finalized</a:t>
-            </a:r>
-          </a:p>
-          <a:p>
-            <a:pPr>
-              <a:lnSpc>
-                <a:spcPct val="120000"/>
-              </a:lnSpc>
-              <a:spcAft>
-                <a:spcPts val="1800"/>
-              </a:spcAft>
-            </a:pPr>
-            <a:r>
-              <a:rPr sz="1900">
-                <a:solidFill>
-                  <a:srgbClr val="F2F4F8"/>
-                </a:solidFill>
-                <a:latin typeface="Avenir Next"/>
-              </a:rPr>
-              <a:t>—  Potential collaboration on the “analyze” step of the Stage 3 loop</a:t>
-            </a:r>
-          </a:p>
-          <a:p>
-            <a:pPr>
-              <a:lnSpc>
-                <a:spcPct val="120000"/>
-              </a:lnSpc>
-              <a:spcAft>
-                <a:spcPts val="1800"/>
-              </a:spcAft>
-            </a:pPr>
-            <a:r>
-              <a:rPr sz="1900">
-                <a:solidFill>
-                  <a:srgbClr val="F2F4F8"/>
-                </a:solidFill>
-                <a:latin typeface="Avenir Next"/>
-              </a:rPr>
-              <a:t>—  Evaluating whether their approach complements what Minds already gives us</a:t>
-            </a:r>
-          </a:p>
-          <a:p>
-            <a:pPr>
-              <a:lnSpc>
-                <a:spcPct val="120000"/>
-              </a:lnSpc>
-              <a:spcAft>
-                <a:spcPts val="1800"/>
-              </a:spcAft>
-            </a:pPr>
-            <a:r>
-              <a:rPr sz="1900">
-                <a:solidFill>
-                  <a:srgbClr val="F2F4F8"/>
-                </a:solidFill>
-                <a:latin typeface="Avenir Next"/>
-              </a:rPr>
-              <a:t>—  Full transparency: exploration, not a commitment</a:t>
-            </a:r>
-          </a:p>
-        </p:txBody>
-      </p:sp>
-      <p:sp>
-        <p:nvSpPr>
-          <p:cNvPr id="8" name="TextBox 7"/>
-          <p:cNvSpPr txBox="1"/>
-          <p:nvPr/>
-        </p:nvSpPr>
-        <p:spPr>
-          <a:xfrm>
-            <a:off x="502920" y="6492240"/>
-            <a:ext cx="8229600" cy="274320"/>
-          </a:xfrm>
-          <a:prstGeom prst="rect">
-            <a:avLst/>
-          </a:prstGeom>
-          <a:noFill/>
-        </p:spPr>
-        <p:txBody>
-          <a:bodyPr wrap="square" anchor="t">
-            <a:spAutoFit/>
-          </a:bodyPr>
-          <a:lstStyle/>
-          <a:p>
-            <a:pPr algn="l">
-              <a:lnSpc>
-                <a:spcPct val="115000"/>
-              </a:lnSpc>
-            </a:pPr>
-            <a:r>
-              <a:rPr sz="950" b="0" i="0">
-                <a:solidFill>
-                  <a:srgbClr val="6B748C"/>
-                </a:solidFill>
-                <a:latin typeface="Avenir Next"/>
-              </a:rPr>
-              <a:t>LaunchMinds  ·  Built on Minds  ·  2026</a:t>
-            </a:r>
-          </a:p>
-        </p:txBody>
-      </p:sp>
-    </p:spTree>
-  </p:cSld>
-  <p:clrMapOvr>
-    <a:masterClrMapping/>
-  </p:clrMapOvr>
-</p:sld>
-</file>
-
-<file path=ppt/slides/slide9.xml><?xml version="1.0" encoding="utf-8"?>
-<p:sld xmlns:a="http://schemas.openxmlformats.org/drawingml/2006/main" xmlns:p="http://schemas.openxmlformats.org/presentationml/2006/main" xmlns:r="http://schemas.openxmlformats.org/officeDocument/2006/relationships">
-  <p:cSld>
-    <p:bg>
-      <p:bgPr>
-        <a:solidFill>
-          <a:srgbClr val="0B0F1A"/>
-        </a:solidFill>
-        <a:effectLst/>
-      </p:bgPr>
-    </p:bg>
-    <p:spTree>
-      <p:nvGrpSpPr>
-        <p:cNvPr id="1" name=""/>
-        <p:cNvGrpSpPr/>
-        <p:nvPr/>
-      </p:nvGrpSpPr>
-      <p:grpSpPr/>
-      <p:sp>
-        <p:nvSpPr>
-          <p:cNvPr id="2" name="Rectangle 1"/>
-          <p:cNvSpPr/>
-          <p:nvPr/>
-        </p:nvSpPr>
-        <p:spPr>
-          <a:xfrm>
-            <a:off x="502920" y="475488"/>
-            <a:ext cx="384048" cy="50292"/>
-          </a:xfrm>
-          <a:prstGeom prst="rect">
-            <a:avLst/>
-          </a:prstGeom>
-          <a:solidFill>
-            <a:srgbClr val="5EE6C0"/>
-          </a:solidFill>
-          <a:ln>
-            <a:noFill/>
-          </a:ln>
-          <a:effectLst/>
-        </p:spPr>
-        <p:style>
-          <a:lnRef idx="1">
-            <a:schemeClr val="accent1"/>
-          </a:lnRef>
-          <a:fillRef idx="3">
-            <a:schemeClr val="accent1"/>
-          </a:fillRef>
-          <a:effectRef idx="2">
-            <a:schemeClr val="accent1"/>
-          </a:effectRef>
-          <a:fontRef idx="minor">
-            <a:schemeClr val="lt1"/>
-          </a:fontRef>
-        </p:style>
-        <p:txBody>
-          <a:bodyPr rtlCol="0" anchor="ctr"/>
-          <a:lstStyle/>
-          <a:p>
-            <a:pPr algn="ctr"/>
-          </a:p>
-        </p:txBody>
-      </p:sp>
-      <p:sp>
-        <p:nvSpPr>
-          <p:cNvPr id="3" name="TextBox 2"/>
-          <p:cNvSpPr txBox="1"/>
-          <p:nvPr/>
-        </p:nvSpPr>
-        <p:spPr>
-          <a:xfrm>
-            <a:off x="502920" y="566928"/>
-            <a:ext cx="7315200" cy="365760"/>
-          </a:xfrm>
-          <a:prstGeom prst="rect">
-            <a:avLst/>
-          </a:prstGeom>
-          <a:noFill/>
-        </p:spPr>
-        <p:txBody>
-          <a:bodyPr wrap="square" anchor="t">
-            <a:spAutoFit/>
-          </a:bodyPr>
-          <a:lstStyle/>
-          <a:p>
-            <a:pPr algn="l">
-              <a:lnSpc>
-                <a:spcPct val="115000"/>
-              </a:lnSpc>
-            </a:pPr>
-            <a:r>
-              <a:rPr sz="1250" b="1" i="0">
-                <a:solidFill>
-                  <a:srgbClr val="A6AFC2"/>
-                </a:solidFill>
-                <a:latin typeface="Avenir Next"/>
-              </a:rPr>
-              <a:t>WHERE THIS GOES</a:t>
-            </a:r>
-          </a:p>
-        </p:txBody>
-      </p:sp>
-      <p:sp>
-        <p:nvSpPr>
-          <p:cNvPr id="4" name="TextBox 3"/>
-          <p:cNvSpPr txBox="1"/>
-          <p:nvPr/>
-        </p:nvSpPr>
-        <p:spPr>
-          <a:xfrm>
-            <a:off x="10881360" y="502920"/>
-            <a:ext cx="822960" cy="365760"/>
-          </a:xfrm>
-          <a:prstGeom prst="rect">
-            <a:avLst/>
-          </a:prstGeom>
-          <a:noFill/>
-        </p:spPr>
-        <p:txBody>
-          <a:bodyPr wrap="square" anchor="t">
-            <a:spAutoFit/>
-          </a:bodyPr>
-          <a:lstStyle/>
-          <a:p>
-            <a:pPr algn="r">
-              <a:lnSpc>
-                <a:spcPct val="115000"/>
-              </a:lnSpc>
-            </a:pPr>
-            <a:r>
-              <a:rPr sz="1250" b="0" i="0">
-                <a:solidFill>
-                  <a:srgbClr val="6B748C"/>
-                </a:solidFill>
-                <a:latin typeface="Avenir Next"/>
-              </a:rPr>
-              <a:t>08 / 08</a:t>
+              <a:t>07 / 07</a:t>
             </a:r>
           </a:p>
         </p:txBody>

--- a/presentations/launchminds-agent-evolution-2026-08/launchminds-deck.pptx
+++ b/presentations/launchminds-agent-evolution-2026-08/launchminds-deck.pptx
@@ -509,7 +509,7 @@
           <a:lstStyle/>
           <a:p>
             <a:r>
-              <a:t>Good [morning/afternoon] — today I want to walk you through how LaunchMinds is evolving, from an assistant to something increasingly autonomous, and what that's been like to build on Minds. Our name isn't an accident: Launch, plus Minds. We picked it because Minds is the foundation everything we do stands on — the same role Claude or GPT-4 plays for other companies, Minds plays for us. What you'll see today is proof of what that foundation makes possible, and where we want to take it next, together.</a:t>
+              <a:t>Good [morning/afternoon] — today I want to walk you through how LaunchMinds is evolving, from an assistant to something increasingly autonomous, and what that's been like to build on Minds. Our name isn't an accident: Launch, plus Minds. We picked it because Minds is the foundation everything we do stands on. What you'll see today is proof of what that foundation makes possible, and where we want to take it next, together.</a:t>
             </a:r>
           </a:p>
         </p:txBody>

--- a/presentations/launchminds-agent-evolution-2026-08/launchminds-deck.pptx
+++ b/presentations/launchminds-agent-evolution-2026-08/launchminds-deck.pptx
@@ -509,7 +509,7 @@
           <a:lstStyle/>
           <a:p>
             <a:r>
-              <a:t>Good [morning/afternoon] — today I want to walk you through how LaunchMinds is evolving, from an assistant to something increasingly autonomous, and what that's been like to build on Minds. Our name isn't an accident: Launch, plus Minds. We picked it because Minds is the foundation everything we do stands on. What you'll see today is proof of what that foundation makes possible, and where we want to take it next, together.</a:t>
+              <a:t>Good afternoon — today I want to walk you through how LaunchMinds is evolving, from an assistant to something increasingly autonomous. Our name: Launch, plus Minds. We picked it because Minds is the foundation everything we do stands on. What you'll see today is proof of what Minds makes possible, and where we want to take it next, together.</a:t>
             </a:r>
           </a:p>
         </p:txBody>

--- a/presentations/launchminds-agent-evolution-2026-08/launchminds-deck.pptx
+++ b/presentations/launchminds-agent-evolution-2026-08/launchminds-deck.pptx
@@ -649,7 +649,7 @@
           <a:lstStyle/>
           <a:p>
             <a:r>
-              <a:t>[read core line]. Two things are doing the work here, and they're worth separating for this room. Harness is our layer — the proprietary context and memory that make a plan actually understand a specific brand, a specific market, a specific history of what's worked before. Minds is what Harness runs on — the model layer, the actual reasoning underneath every plan we generate. Harness without Minds is just a database. Minds without Harness is generic. Together, that's what makes this Minds-driven, not just Minds-adjacent.</a:t>
+              <a:t>[read core line]. It's worth being precise about what that means, especially for this room — because we didn't build Harness to replace anything Minds already does well. Minds itself already brings real reasoning and its own context and memory capability, and it natively handles the market, campaign, and performance analysis that powers a lot of what LaunchMinds does. We didn't rebuild any of that. What Harness adds is narrower and more specific: it's where we store the things that are genuinely ours — a brand's enterprise materials, its working habits, a team's preferences and tendencies. That's memory Minds has no way to have on its own, because it's ours, not generic. So this isn't two clean stacked layers, reasoning here, memory there — it's Minds doing what Minds already does natively, and Harness adding exactly the one layer that's LaunchMinds-specific on top.</a:t>
             </a:r>
           </a:p>
         </p:txBody>
@@ -929,7 +929,7 @@
           <a:lstStyle/>
           <a:p>
             <a:r>
-              <a:t>Stage three is our next milestone, and it's the part I think matters most for this room. We're building a per-project workspace where multiple Minds instances coordinate with each other — thinking through strategy, executing it, reading the results, and adjusting together. We're not locking that into a fixed pipeline of roles; the shape of that group adapts to what each campaign actually needs. This is the clearest place you'll see what your platform makes possible when we push it toward real multi-agent coordination.</a:t>
+              <a:t>Stage three is our next milestone, and it's the part I think matters most for this room. We're building a per-project workspace where multiple Minds instances work together — planning, executing, analyzing, adjusting — coordinating in a loop. To be accurate about it: this isn't a fixed pipeline of roles bolted together. The shape of that group adapts to what a given project actually needs, not a rigid four-step assembly line. One thing worth being precise on: when one of those Minds instances is analyzing market, campaign, or performance data, it's leaning on capability Minds already natively provides — we're not building a custom analysis engine externally. What we add through Harness is context: the enterprise materials, working habits, and team preferences that make that native analysis specific to a brand instead of generic. This is the clearest place you'll see what your platform makes possible when we push it toward real multi-agent coordination.</a:t>
             </a:r>
           </a:p>
         </p:txBody>
@@ -4826,13 +4826,13 @@
               </a:lnSpc>
             </a:pPr>
             <a:r>
-              <a:rPr sz="3400" b="1" i="0">
+              <a:rPr sz="3200" b="1" i="0">
                 <a:solidFill>
                   <a:srgbClr val="F2F4F8"/>
                 </a:solidFill>
                 <a:latin typeface="Avenir Next"/>
               </a:rPr>
-              <a:t>LaunchMinds = Harness + Minds</a:t>
+              <a:t>What Minds gives us, what Harness adds</a:t>
             </a:r>
           </a:p>
         </p:txBody>
@@ -4845,8 +4845,215 @@
         </p:nvSpPr>
         <p:spPr>
           <a:xfrm>
-            <a:off x="502920" y="1691640"/>
-            <a:ext cx="4937760" cy="914400"/>
+            <a:off x="502920" y="1645920"/>
+            <a:ext cx="11155680" cy="960120"/>
+          </a:xfrm>
+          <a:prstGeom prst="roundRect">
+            <a:avLst>
+              <a:gd name="adj" fmla="val 8000"/>
+            </a:avLst>
+          </a:prstGeom>
+          <a:solidFill>
+            <a:srgbClr val="182138"/>
+          </a:solidFill>
+          <a:ln>
+            <a:noFill/>
+          </a:ln>
+          <a:effectLst/>
+        </p:spPr>
+        <p:style>
+          <a:lnRef idx="1">
+            <a:schemeClr val="accent1"/>
+          </a:lnRef>
+          <a:fillRef idx="3">
+            <a:schemeClr val="accent1"/>
+          </a:fillRef>
+          <a:effectRef idx="2">
+            <a:schemeClr val="accent1"/>
+          </a:effectRef>
+          <a:fontRef idx="minor">
+            <a:schemeClr val="lt1"/>
+          </a:fontRef>
+        </p:style>
+        <p:txBody>
+          <a:bodyPr rtlCol="0" anchor="ctr"/>
+          <a:lstStyle/>
+          <a:p>
+            <a:pPr algn="ctr"/>
+          </a:p>
+        </p:txBody>
+      </p:sp>
+      <p:sp>
+        <p:nvSpPr>
+          <p:cNvPr id="7" name="Rectangle 6"/>
+          <p:cNvSpPr/>
+          <p:nvPr/>
+        </p:nvSpPr>
+        <p:spPr>
+          <a:xfrm>
+            <a:off x="502920" y="1645920"/>
+            <a:ext cx="73152" cy="960120"/>
+          </a:xfrm>
+          <a:prstGeom prst="rect">
+            <a:avLst/>
+          </a:prstGeom>
+          <a:solidFill>
+            <a:srgbClr val="7C9CFF"/>
+          </a:solidFill>
+          <a:ln>
+            <a:noFill/>
+          </a:ln>
+          <a:effectLst/>
+        </p:spPr>
+        <p:style>
+          <a:lnRef idx="1">
+            <a:schemeClr val="accent1"/>
+          </a:lnRef>
+          <a:fillRef idx="3">
+            <a:schemeClr val="accent1"/>
+          </a:fillRef>
+          <a:effectRef idx="2">
+            <a:schemeClr val="accent1"/>
+          </a:effectRef>
+          <a:fontRef idx="minor">
+            <a:schemeClr val="lt1"/>
+          </a:fontRef>
+        </p:style>
+        <p:txBody>
+          <a:bodyPr rtlCol="0" anchor="ctr"/>
+          <a:lstStyle/>
+          <a:p>
+            <a:pPr algn="ctr"/>
+          </a:p>
+        </p:txBody>
+      </p:sp>
+      <p:sp>
+        <p:nvSpPr>
+          <p:cNvPr id="8" name="TextBox 7"/>
+          <p:cNvSpPr txBox="1"/>
+          <p:nvPr/>
+        </p:nvSpPr>
+        <p:spPr>
+          <a:xfrm>
+            <a:off x="822960" y="1783080"/>
+            <a:ext cx="10332720" cy="320040"/>
+          </a:xfrm>
+          <a:prstGeom prst="rect">
+            <a:avLst/>
+          </a:prstGeom>
+          <a:noFill/>
+        </p:spPr>
+        <p:txBody>
+          <a:bodyPr wrap="square" anchor="t">
+            <a:spAutoFit/>
+          </a:bodyPr>
+          <a:lstStyle/>
+          <a:p>
+            <a:pPr algn="l">
+              <a:lnSpc>
+                <a:spcPct val="115000"/>
+              </a:lnSpc>
+            </a:pPr>
+            <a:r>
+              <a:rPr sz="1500" b="1" i="0">
+                <a:solidFill>
+                  <a:srgbClr val="7C9CFF"/>
+                </a:solidFill>
+                <a:latin typeface="Avenir Next"/>
+              </a:rPr>
+              <a:t>MINDS — what it already does natively</a:t>
+            </a:r>
+          </a:p>
+        </p:txBody>
+      </p:sp>
+      <p:sp>
+        <p:nvSpPr>
+          <p:cNvPr id="9" name="TextBox 8"/>
+          <p:cNvSpPr txBox="1"/>
+          <p:nvPr/>
+        </p:nvSpPr>
+        <p:spPr>
+          <a:xfrm>
+            <a:off x="822960" y="2148840"/>
+            <a:ext cx="10332720" cy="365760"/>
+          </a:xfrm>
+          <a:prstGeom prst="rect">
+            <a:avLst/>
+          </a:prstGeom>
+          <a:noFill/>
+        </p:spPr>
+        <p:txBody>
+          <a:bodyPr wrap="square" anchor="t">
+            <a:spAutoFit/>
+          </a:bodyPr>
+          <a:lstStyle/>
+          <a:p>
+            <a:pPr algn="l">
+              <a:lnSpc>
+                <a:spcPct val="115000"/>
+              </a:lnSpc>
+            </a:pPr>
+            <a:r>
+              <a:rPr sz="1450" b="0" i="0">
+                <a:solidFill>
+                  <a:srgbClr val="A6AFC2"/>
+                </a:solidFill>
+                <a:latin typeface="Avenir Next"/>
+              </a:rPr>
+              <a:t>Reasoning  ·  its own context &amp; memory  ·  market, campaign &amp; performance analysis</a:t>
+            </a:r>
+          </a:p>
+        </p:txBody>
+      </p:sp>
+      <p:sp>
+        <p:nvSpPr>
+          <p:cNvPr id="10" name="TextBox 9"/>
+          <p:cNvSpPr txBox="1"/>
+          <p:nvPr/>
+        </p:nvSpPr>
+        <p:spPr>
+          <a:xfrm>
+            <a:off x="502920" y="2624328"/>
+            <a:ext cx="548640" cy="320040"/>
+          </a:xfrm>
+          <a:prstGeom prst="rect">
+            <a:avLst/>
+          </a:prstGeom>
+          <a:noFill/>
+        </p:spPr>
+        <p:txBody>
+          <a:bodyPr wrap="square" anchor="t">
+            <a:spAutoFit/>
+          </a:bodyPr>
+          <a:lstStyle/>
+          <a:p>
+            <a:pPr algn="ctr">
+              <a:lnSpc>
+                <a:spcPct val="115000"/>
+              </a:lnSpc>
+            </a:pPr>
+            <a:r>
+              <a:rPr sz="2400" b="0" i="0">
+                <a:solidFill>
+                  <a:srgbClr val="6B748C"/>
+                </a:solidFill>
+                <a:latin typeface="Avenir Next"/>
+              </a:rPr>
+              <a:t>+</a:t>
+            </a:r>
+          </a:p>
+        </p:txBody>
+      </p:sp>
+      <p:sp>
+        <p:nvSpPr>
+          <p:cNvPr id="11" name="Rounded Rectangle 10"/>
+          <p:cNvSpPr/>
+          <p:nvPr/>
+        </p:nvSpPr>
+        <p:spPr>
+          <a:xfrm>
+            <a:off x="1600200" y="2990088"/>
+            <a:ext cx="8778240" cy="868680"/>
           </a:xfrm>
           <a:prstGeom prst="roundRect">
             <a:avLst>
@@ -4885,139 +5092,20 @@
       </p:sp>
       <p:sp>
         <p:nvSpPr>
-          <p:cNvPr id="7" name="TextBox 6"/>
-          <p:cNvSpPr txBox="1"/>
-          <p:nvPr/>
-        </p:nvSpPr>
-        <p:spPr>
-          <a:xfrm>
-            <a:off x="822960" y="1837944"/>
-            <a:ext cx="4297680" cy="320040"/>
-          </a:xfrm>
-          <a:prstGeom prst="rect">
-            <a:avLst/>
-          </a:prstGeom>
-          <a:noFill/>
-        </p:spPr>
-        <p:txBody>
-          <a:bodyPr wrap="square" anchor="t">
-            <a:spAutoFit/>
-          </a:bodyPr>
-          <a:lstStyle/>
-          <a:p>
-            <a:pPr algn="l">
-              <a:lnSpc>
-                <a:spcPct val="115000"/>
-              </a:lnSpc>
-            </a:pPr>
-            <a:r>
-              <a:rPr sz="1500" b="1" i="0">
-                <a:solidFill>
-                  <a:srgbClr val="5EE6C0"/>
-                </a:solidFill>
-                <a:latin typeface="Avenir Next"/>
-              </a:rPr>
-              <a:t>HARNESS</a:t>
-            </a:r>
-          </a:p>
-        </p:txBody>
-      </p:sp>
-      <p:sp>
-        <p:nvSpPr>
-          <p:cNvPr id="8" name="TextBox 7"/>
-          <p:cNvSpPr txBox="1"/>
-          <p:nvPr/>
-        </p:nvSpPr>
-        <p:spPr>
-          <a:xfrm>
-            <a:off x="822960" y="2167128"/>
-            <a:ext cx="4297680" cy="365760"/>
-          </a:xfrm>
-          <a:prstGeom prst="rect">
-            <a:avLst/>
-          </a:prstGeom>
-          <a:noFill/>
-        </p:spPr>
-        <p:txBody>
-          <a:bodyPr wrap="square" anchor="t">
-            <a:spAutoFit/>
-          </a:bodyPr>
-          <a:lstStyle/>
-          <a:p>
-            <a:pPr algn="l">
-              <a:lnSpc>
-                <a:spcPct val="115000"/>
-              </a:lnSpc>
-            </a:pPr>
-            <a:r>
-              <a:rPr sz="1350" b="0" i="0">
-                <a:solidFill>
-                  <a:srgbClr val="A6AFC2"/>
-                </a:solidFill>
-                <a:latin typeface="Avenir Next"/>
-              </a:rPr>
-              <a:t>Context layer — proprietary enterprise memory</a:t>
-            </a:r>
-          </a:p>
-        </p:txBody>
-      </p:sp>
-      <p:sp>
-        <p:nvSpPr>
-          <p:cNvPr id="9" name="TextBox 8"/>
-          <p:cNvSpPr txBox="1"/>
-          <p:nvPr/>
-        </p:nvSpPr>
-        <p:spPr>
-          <a:xfrm>
-            <a:off x="5623560" y="1947672"/>
-            <a:ext cx="457200" cy="457200"/>
-          </a:xfrm>
-          <a:prstGeom prst="rect">
-            <a:avLst/>
-          </a:prstGeom>
-          <a:noFill/>
-        </p:spPr>
-        <p:txBody>
-          <a:bodyPr wrap="square" anchor="t">
-            <a:spAutoFit/>
-          </a:bodyPr>
-          <a:lstStyle/>
-          <a:p>
-            <a:pPr algn="ctr">
-              <a:lnSpc>
-                <a:spcPct val="115000"/>
-              </a:lnSpc>
-            </a:pPr>
-            <a:r>
-              <a:rPr sz="3000" b="0" i="0">
-                <a:solidFill>
-                  <a:srgbClr val="6B748C"/>
-                </a:solidFill>
-                <a:latin typeface="Avenir Next"/>
-              </a:rPr>
-              <a:t>+</a:t>
-            </a:r>
-          </a:p>
-        </p:txBody>
-      </p:sp>
-      <p:sp>
-        <p:nvSpPr>
-          <p:cNvPr id="10" name="Rounded Rectangle 9"/>
+          <p:cNvPr id="12" name="Rectangle 11"/>
           <p:cNvSpPr/>
           <p:nvPr/>
         </p:nvSpPr>
         <p:spPr>
           <a:xfrm>
-            <a:off x="6263640" y="1691640"/>
-            <a:ext cx="4937760" cy="914400"/>
-          </a:xfrm>
-          <a:prstGeom prst="roundRect">
-            <a:avLst>
-              <a:gd name="adj" fmla="val 8000"/>
-            </a:avLst>
+            <a:off x="1600200" y="2990088"/>
+            <a:ext cx="73152" cy="868680"/>
+          </a:xfrm>
+          <a:prstGeom prst="rect">
+            <a:avLst/>
           </a:prstGeom>
           <a:solidFill>
-            <a:srgbClr val="182138"/>
+            <a:srgbClr val="5EE6C0"/>
           </a:solidFill>
           <a:ln>
             <a:noFill/>
@@ -5048,58 +5136,14 @@
       </p:sp>
       <p:sp>
         <p:nvSpPr>
-          <p:cNvPr id="11" name="Rectangle 10"/>
-          <p:cNvSpPr/>
-          <p:nvPr/>
-        </p:nvSpPr>
-        <p:spPr>
-          <a:xfrm>
-            <a:off x="6263640" y="1691640"/>
-            <a:ext cx="73152" cy="914400"/>
-          </a:xfrm>
-          <a:prstGeom prst="rect">
-            <a:avLst/>
-          </a:prstGeom>
-          <a:solidFill>
-            <a:srgbClr val="7C9CFF"/>
-          </a:solidFill>
-          <a:ln>
-            <a:noFill/>
-          </a:ln>
-          <a:effectLst/>
-        </p:spPr>
-        <p:style>
-          <a:lnRef idx="1">
-            <a:schemeClr val="accent1"/>
-          </a:lnRef>
-          <a:fillRef idx="3">
-            <a:schemeClr val="accent1"/>
-          </a:fillRef>
-          <a:effectRef idx="2">
-            <a:schemeClr val="accent1"/>
-          </a:effectRef>
-          <a:fontRef idx="minor">
-            <a:schemeClr val="lt1"/>
-          </a:fontRef>
-        </p:style>
-        <p:txBody>
-          <a:bodyPr rtlCol="0" anchor="ctr"/>
-          <a:lstStyle/>
-          <a:p>
-            <a:pPr algn="ctr"/>
-          </a:p>
-        </p:txBody>
-      </p:sp>
-      <p:sp>
-        <p:nvSpPr>
-          <p:cNvPr id="12" name="TextBox 11"/>
+          <p:cNvPr id="13" name="TextBox 12"/>
           <p:cNvSpPr txBox="1"/>
           <p:nvPr/>
         </p:nvSpPr>
         <p:spPr>
           <a:xfrm>
-            <a:off x="6583680" y="1837944"/>
-            <a:ext cx="4297680" cy="320040"/>
+            <a:off x="1920240" y="3118104"/>
+            <a:ext cx="8138160" cy="320040"/>
           </a:xfrm>
           <a:prstGeom prst="rect">
             <a:avLst/>
@@ -5120,25 +5164,25 @@
             <a:r>
               <a:rPr sz="1500" b="1" i="0">
                 <a:solidFill>
-                  <a:srgbClr val="7C9CFF"/>
-                </a:solidFill>
-                <a:latin typeface="Avenir Next"/>
-              </a:rPr>
-              <a:t>MINDS</a:t>
-            </a:r>
-          </a:p>
-        </p:txBody>
-      </p:sp>
-      <p:sp>
-        <p:nvSpPr>
-          <p:cNvPr id="13" name="TextBox 12"/>
+                  <a:srgbClr val="5EE6C0"/>
+                </a:solidFill>
+                <a:latin typeface="Avenir Next"/>
+              </a:rPr>
+              <a:t>HARNESS — the one layer that's ours</a:t>
+            </a:r>
+          </a:p>
+        </p:txBody>
+      </p:sp>
+      <p:sp>
+        <p:nvSpPr>
+          <p:cNvPr id="14" name="TextBox 13"/>
           <p:cNvSpPr txBox="1"/>
           <p:nvPr/>
         </p:nvSpPr>
         <p:spPr>
           <a:xfrm>
-            <a:off x="6583680" y="2167128"/>
-            <a:ext cx="4297680" cy="365760"/>
+            <a:off x="1920240" y="3465576"/>
+            <a:ext cx="8138160" cy="365760"/>
           </a:xfrm>
           <a:prstGeom prst="rect">
             <a:avLst/>
@@ -5157,27 +5201,27 @@
               </a:lnSpc>
             </a:pPr>
             <a:r>
-              <a:rPr sz="1350" b="0" i="0">
+              <a:rPr sz="1450" b="0" i="0">
                 <a:solidFill>
                   <a:srgbClr val="A6AFC2"/>
                 </a:solidFill>
                 <a:latin typeface="Avenir Next"/>
               </a:rPr>
-              <a:t>Model layer — the reasoning engine underneath</a:t>
-            </a:r>
-          </a:p>
-        </p:txBody>
-      </p:sp>
-      <p:sp>
-        <p:nvSpPr>
-          <p:cNvPr id="14" name="Rounded Rectangle 13"/>
+              <a:t>Enterprise materials  ·  brand working habits  ·  team preferences</a:t>
+            </a:r>
+          </a:p>
+        </p:txBody>
+      </p:sp>
+      <p:sp>
+        <p:nvSpPr>
+          <p:cNvPr id="15" name="Rounded Rectangle 14"/>
           <p:cNvSpPr/>
           <p:nvPr/>
         </p:nvSpPr>
         <p:spPr>
           <a:xfrm>
-            <a:off x="502920" y="2926080"/>
-            <a:ext cx="11155680" cy="1874519"/>
+            <a:off x="502920" y="4087368"/>
+            <a:ext cx="11155680" cy="1417320"/>
           </a:xfrm>
           <a:prstGeom prst="roundRect">
             <a:avLst>
@@ -5216,14 +5260,14 @@
       </p:sp>
       <p:sp>
         <p:nvSpPr>
-          <p:cNvPr id="15" name="Rectangle 14"/>
+          <p:cNvPr id="16" name="Rectangle 15"/>
           <p:cNvSpPr/>
           <p:nvPr/>
         </p:nvSpPr>
         <p:spPr>
           <a:xfrm>
-            <a:off x="502920" y="2926080"/>
-            <a:ext cx="82296" cy="1874519"/>
+            <a:off x="502920" y="4087368"/>
+            <a:ext cx="82296" cy="1417320"/>
           </a:xfrm>
           <a:prstGeom prst="rect">
             <a:avLst/>
@@ -5260,14 +5304,14 @@
       </p:sp>
       <p:sp>
         <p:nvSpPr>
-          <p:cNvPr id="16" name="TextBox 15"/>
+          <p:cNvPr id="17" name="TextBox 16"/>
           <p:cNvSpPr txBox="1"/>
           <p:nvPr/>
         </p:nvSpPr>
         <p:spPr>
           <a:xfrm>
-            <a:off x="914400" y="3108960"/>
-            <a:ext cx="10332720" cy="1554480"/>
+            <a:off x="914400" y="4224528"/>
+            <a:ext cx="10332720" cy="1188720"/>
           </a:xfrm>
           <a:prstGeom prst="rect">
             <a:avLst/>
@@ -5282,11 +5326,11 @@
           <a:p>
             <a:pPr algn="l">
               <a:lnSpc>
-                <a:spcPct val="128000"/>
-              </a:lnSpc>
-            </a:pPr>
-            <a:r>
-              <a:rPr sz="1850" b="0" i="1">
+                <a:spcPct val="125000"/>
+              </a:lnSpc>
+            </a:pPr>
+            <a:r>
+              <a:rPr sz="1550" b="0" i="1">
                 <a:solidFill>
                   <a:srgbClr val="F2F4F8"/>
                 </a:solidFill>
@@ -5299,14 +5343,14 @@
       </p:sp>
       <p:sp>
         <p:nvSpPr>
-          <p:cNvPr id="17" name="TextBox 16"/>
+          <p:cNvPr id="18" name="TextBox 17"/>
           <p:cNvSpPr txBox="1"/>
           <p:nvPr/>
         </p:nvSpPr>
         <p:spPr>
           <a:xfrm>
-            <a:off x="502920" y="5074920"/>
-            <a:ext cx="10789920" cy="822960"/>
+            <a:off x="502920" y="5641848"/>
+            <a:ext cx="10789920" cy="548640"/>
           </a:xfrm>
           <a:prstGeom prst="rect">
             <a:avLst/>
@@ -5321,40 +5365,40 @@
           <a:p>
             <a:pPr algn="l">
               <a:lnSpc>
-                <a:spcPct val="130000"/>
-              </a:lnSpc>
-            </a:pPr>
-            <a:r>
-              <a:rPr sz="1650" b="0" i="1">
+                <a:spcPct val="125000"/>
+              </a:lnSpc>
+            </a:pPr>
+            <a:r>
+              <a:rPr sz="1450" b="0" i="1">
                 <a:solidFill>
                   <a:srgbClr val="5EE6C0"/>
                 </a:solidFill>
                 <a:latin typeface="Avenir Next"/>
               </a:rPr>
-              <a:t>Harness without Minds is just a database. Minds without Harness is generic.</a:t>
+              <a:t>Not two stacked layers — Minds doing what it already does natively,</a:t>
             </a:r>
           </a:p>
           <a:p>
             <a:pPr algn="l">
               <a:lnSpc>
-                <a:spcPct val="130000"/>
-              </a:lnSpc>
-            </a:pPr>
-            <a:r>
-              <a:rPr sz="1650" b="0" i="1">
+                <a:spcPct val="125000"/>
+              </a:lnSpc>
+            </a:pPr>
+            <a:r>
+              <a:rPr sz="1450" b="0" i="1">
                 <a:solidFill>
                   <a:srgbClr val="5EE6C0"/>
                 </a:solidFill>
                 <a:latin typeface="Avenir Next"/>
               </a:rPr>
-              <a:t>Together, that's Minds-driven — not just Minds-adjacent.</a:t>
-            </a:r>
-          </a:p>
-        </p:txBody>
-      </p:sp>
-      <p:sp>
-        <p:nvSpPr>
-          <p:cNvPr id="18" name="TextBox 17"/>
+              <a:t>Harness adding the one layer that's ours.</a:t>
+            </a:r>
+          </a:p>
+        </p:txBody>
+      </p:sp>
+      <p:sp>
+        <p:nvSpPr>
+          <p:cNvPr id="19" name="TextBox 18"/>
           <p:cNvSpPr txBox="1"/>
           <p:nvPr/>
         </p:nvSpPr>
@@ -8353,7 +8397,7 @@
                 </a:solidFill>
                 <a:latin typeface="Avenir Next"/>
               </a:rPr>
-              <a:t>—  Per-project workspace: multiple Minds instances coordinating</a:t>
+              <a:t>—  Multiple Minds instances working together — plan, execute, analyze, adjust</a:t>
             </a:r>
           </a:p>
           <a:p>
@@ -8372,7 +8416,7 @@
                 </a:solidFill>
                 <a:latin typeface="Avenir Next"/>
               </a:rPr>
-              <a:t>—  No fixed pipeline of roles — the group's shape adapts to what the campaign needs</a:t>
+              <a:t>—  No fixed pipeline — the group's shape adapts to the project</a:t>
             </a:r>
           </a:p>
           <a:p>
@@ -8391,7 +8435,26 @@
                 </a:solidFill>
                 <a:latin typeface="Avenir Next"/>
               </a:rPr>
-              <a:t>—  Where we push toward real multi-agent coordination on your platform</a:t>
+              <a:t>—  Analysis leans on Minds' own native market/campaign/performance capability</a:t>
+            </a:r>
+          </a:p>
+          <a:p>
+            <a:pPr>
+              <a:lnSpc>
+                <a:spcPct val="120000"/>
+              </a:lnSpc>
+              <a:spcAft>
+                <a:spcPts val="1200"/>
+              </a:spcAft>
+            </a:pPr>
+            <a:r>
+              <a:rPr sz="1450">
+                <a:solidFill>
+                  <a:srgbClr val="F2F4F8"/>
+                </a:solidFill>
+                <a:latin typeface="Avenir Next"/>
+              </a:rPr>
+              <a:t>—  Harness feeds in what's LaunchMinds-specific: enterprise materials, habits, team preferences</a:t>
             </a:r>
           </a:p>
         </p:txBody>

--- a/presentations/launchminds-agent-evolution-2026-08/launchminds-deck.pptx
+++ b/presentations/launchminds-agent-evolution-2026-08/launchminds-deck.pptx
@@ -509,7 +509,7 @@
           <a:lstStyle/>
           <a:p>
             <a:r>
-              <a:t>Good afternoon — today I want to walk you through how LaunchMinds is evolving, from an assistant to something increasingly autonomous. Our name: Launch, plus Minds. We picked it because Minds is the foundation everything we do stands on. What you'll see today is proof of what Minds makes possible, and where we want to take it next, together.</a:t>
+              <a:t>Good afternoon. LaunchMinds is the Agentic Campaign Operations System for project teams. Instead of helping with one isolated marketing task, it maintains project intelligence, carries campaign work across sessions, and moves from an objective to a verified outcome within explicit approval boundaries. We built it on Minds because campaign operations are long-running, stateful, multi-party, and increasingly transactional. Our name reflects that directly — Launch, plus Minds — because everything we're about to show you is built on your platform, not next to it. Today I want to show you how we're moving from assisted work to persistent, accountable campaign operations.</a:t>
             </a:r>
           </a:p>
         </p:txBody>
@@ -579,7 +579,7 @@
           <a:lstStyle/>
           <a:p>
             <a:r>
-              <a:t>Brand marketing today is stitched together by hand — one tool for campaign design, another for deployment, a spreadsheet for resource orchestration, and a person holding it all in their head. That doesn't scale, and it doesn't get smarter over time. We don't think the fix is another point tool. It's a system that reasons across the entire lifecycle — and that requires real intelligence at the core, not automation scripts with an AI label on them.</a:t>
+              <a:t>Campaign operations today are stitched together by hand — one tool for campaign design, another for deployment, a spreadsheet for resource orchestration, and a person holding it all in their head. Nothing persists between sessions, and nothing is accountable across the full lifecycle, from objective to verified outcome. We don't think the fix is another point tool. It's a system that carries state, enforces approval, and stays accountable across the entire campaign lifecycle.</a:t>
             </a:r>
           </a:p>
         </p:txBody>
@@ -649,7 +649,7 @@
           <a:lstStyle/>
           <a:p>
             <a:r>
-              <a:t>[read core line]. It's worth being precise about what that means, especially for this room — because we didn't build Harness to replace anything Minds already does well. Minds itself already brings real reasoning and its own context and memory capability, and it natively handles the market, campaign, and performance analysis that powers a lot of what LaunchMinds does. We didn't rebuild any of that. What Harness adds is narrower and more specific: it's where we store the things that are genuinely ours — a brand's enterprise materials, its working habits, a team's preferences and tendencies. That's memory Minds has no way to have on its own, because it's ours, not generic. So this isn't two clean stacked layers, reasoning here, memory there — it's Minds doing what Minds already does natively, and Harness adding exactly the one layer that's LaunchMinds-specific on top.</a:t>
+              <a:t>Minds is not simply the model underneath LaunchMinds. It is the horizontal agent platform that gives every Mind continuity, identity, memory, tools, collaboration, and the ability to keep working beyond a single chat. LaunchMinds is the vertical operating layer built on top. We maintain the trusted project intelligence, campaign state, approval rules, budget constraints, participant evidence, settlement logic, and outcome history. Minds provides the general ability to reason and act. LaunchMinds defines how that ability operates safely and measurably inside campaign operations. That is the division of labor: Minds makes agents persistent and capable; LaunchMinds makes campaign operations accountable.</a:t>
             </a:r>
           </a:p>
         </p:txBody>
@@ -719,7 +719,7 @@
           <a:lstStyle/>
           <a:p>
             <a:r>
-              <a:t>If you've watched how coding assistants evolved, you've seen this arc: first, assisted completion — suggestions, not action. Then single-session execution — an agent that completes a full task in one sitting, with a human watching. Then true agent mode — long-running, autonomous, checking its own work. We're building LaunchMinds through that same three-stage arc, applied to brand marketing instead of code. And because we built it Minds-native from the start, each stage is a Minds workflow — not a script with a model bolted on.</a:t>
+              <a:t>If you've watched how coding assistants evolved, you've seen this arc: first, assisted completion — suggestions, not action. Then single-session execution — an agent that completes a full task in one sitting, with a human watching. Then persistent, bounded operation — long-running, accountable, checking its own work within explicit limits. We're building LaunchMinds through that same three-stage arc, applied to campaign operations instead of code. And because we built it Minds-native from the start, each stage is a Minds workflow — not a script with a model bolted on.</a:t>
             </a:r>
           </a:p>
         </p:txBody>
@@ -789,7 +789,7 @@
           <a:lstStyle/>
           <a:p>
             <a:r>
-              <a:t>Stage one is done and live. This is assisted completion — Minds helping a human draft a campaign: proposing structure, pulling in context Harness has stored, drafting copy. The human stays in the loop at every step. It's the smallest, safest version of Minds-driven work, and it's already saving our team real hours today.</a:t>
+              <a:t>Stage one is assisted completion. A Mind drafts campaign structures, task mechanics, and copy grounded in the trusted project intelligence maintained by LaunchMinds. The operator reviews and approves every output. The value at this stage is speed and consistency, but the human still owns every step of the workflow.</a:t>
             </a:r>
           </a:p>
         </p:txBody>
@@ -859,7 +859,7 @@
           <a:lstStyle/>
           <a:p>
             <a:r>
-              <a:t>Stage two is what's live right now. One session, one Mind, handling registration, planning, and deployment end to end — no handoffs between tools. It runs through our internal skill system, which is essentially a set of structured capabilities we hand to Minds so it can act, not just suggest. This is the first stage where Minds does real work autonomously within a session.</a:t>
+              <a:t>Stage two is single-session execution. One persistent Mind can take a project from registration and briefing through campaign planning and deployment preparation without handoffs between different tools. LaunchMinds supplies the campaign-specific intelligence, Skills, state, and permissions. Minds supplies the persistent agent runtime and tool execution. This is where the Mind stops only suggesting and starts completing real operational work — while a human still supervises the session and approves high-impact actions.</a:t>
             </a:r>
           </a:p>
         </p:txBody>
@@ -929,7 +929,7 @@
           <a:lstStyle/>
           <a:p>
             <a:r>
-              <a:t>Stage three is our next milestone, and it's the part I think matters most for this room. We're building a per-project workspace where multiple Minds instances work together — planning, executing, analyzing, adjusting — coordinating in a loop. To be accurate about it: this isn't a fixed pipeline of roles bolted together. The shape of that group adapts to what a given project actually needs, not a rigid four-step assembly line. One thing worth being precise on: when one of those Minds instances is analyzing market, campaign, or performance data, it's leaning on capability Minds already natively provides — we're not building a custom analysis engine externally. What we add through Harness is context: the enterprise materials, working habits, and team preferences that make that native analysis specific to a brand instead of generic. This is the clearest place you'll see what your platform makes possible when we push it toward real multi-agent coordination.</a:t>
+              <a:t>Stage three is not simply about adding more agents. It is the shift from single-session execution to persistent, bounded campaign operations. Each project gets a continuously maintained operating state: its objectives, constraints, budgets, active campaigns, participant evidence, pending approvals, unresolved work, and results. Minds provides the persistent agents, memory, tools, and coordination. LaunchMinds provides the campaign control plane: the trusted project intelligence, action permissions, approval gates, verification rules, and settlement logic. A dynamic team of Minds can form around each campaign — researching, planning, executing, monitoring, verifying, and recovering — without being locked into a fixed pipeline or permanent set of roles. The shape of the team follows the work. Humans define the mandate and approve high-impact actions. Routine operations continue autonomously within those boundaries. Every action is logged, participation is verified before rewards are released, and real outcomes update the next plan. That closes the campaign operations loop: plan, approve, execute, verify, settle, and learn.</a:t>
             </a:r>
           </a:p>
         </p:txBody>
@@ -999,7 +999,7 @@
           <a:lstStyle/>
           <a:p>
             <a:r>
-              <a:t>So: two stages built and live today, one stage actively in motion, built on Minds from day one — not as an integration bolted on after the fact, but as the foundation. We're showing you this because we think it's a good answer to the question every platform has to answer eventually: what gets built on top of us? We'd like to keep building that answer together — with your platform, and with your community. Thanks for the time.</a:t>
+              <a:t>So: two stages built and live today, one stage actively in motion, built on Minds from day one — not as an integration bolted on after the fact, but as the foundation. Minds makes agents persistent and capable. LaunchMinds makes campaign operations accountable. We're showing you this because we think it's a good answer to the question every platform has to answer eventually — what gets built on top of us? We'd like to keep building that answer together, with your platform and your community. Thanks for the time.</a:t>
             </a:r>
           </a:p>
         </p:txBody>
@@ -4227,7 +4227,7 @@
                 </a:solidFill>
                 <a:latin typeface="Avenir Next"/>
               </a:rPr>
-              <a:t>—  AI-native, end-to-end brand marketing platform</a:t>
+              <a:t>—  Agentic Campaign Operations System for project teams</a:t>
             </a:r>
           </a:p>
           <a:p>
@@ -4246,7 +4246,7 @@
                 </a:solidFill>
                 <a:latin typeface="Avenir Next"/>
               </a:rPr>
-              <a:t>—  Powered by Minds, built with Harness</a:t>
+              <a:t>—  Built on Minds' persistent agent platform</a:t>
             </a:r>
           </a:p>
           <a:p>
@@ -4265,7 +4265,7 @@
                 </a:solidFill>
                 <a:latin typeface="Avenir Next"/>
               </a:rPr>
-              <a:t>—  A partnership story, not just a product demo</a:t>
+              <a:t>—  Plan → Approve → Execute → Verify → Settle → Learn</a:t>
             </a:r>
           </a:p>
         </p:txBody>
@@ -4485,13 +4485,13 @@
               </a:lnSpc>
             </a:pPr>
             <a:r>
-              <a:rPr sz="3600" b="1" i="0">
+              <a:rPr sz="3400" b="1" i="0">
                 <a:solidFill>
                   <a:srgbClr val="F2F4F8"/>
                 </a:solidFill>
                 <a:latin typeface="Avenir Next"/>
               </a:rPr>
-              <a:t>Marketing today is stitched</a:t>
+              <a:t>Campaign operations today are</a:t>
             </a:r>
           </a:p>
           <a:p>
@@ -4501,13 +4501,13 @@
               </a:lnSpc>
             </a:pPr>
             <a:r>
-              <a:rPr sz="3600" b="1" i="0">
+              <a:rPr sz="3400" b="1" i="0">
                 <a:solidFill>
                   <a:srgbClr val="F2F4F8"/>
                 </a:solidFill>
                 <a:latin typeface="Avenir Next"/>
               </a:rPr>
-              <a:t>together by hand</a:t>
+              <a:t>stitched together by hand</a:t>
             </a:r>
           </a:p>
         </p:txBody>
@@ -4587,7 +4587,7 @@
                 </a:solidFill>
                 <a:latin typeface="Avenir Next"/>
               </a:rPr>
-              <a:t>—  It doesn't scale, and it doesn't get smarter over time</a:t>
+              <a:t>—  Nothing persists between sessions, and nothing is accountable across the lifecycle</a:t>
             </a:r>
           </a:p>
           <a:p>
@@ -4606,7 +4606,7 @@
                 </a:solidFill>
                 <a:latin typeface="Avenir Next"/>
               </a:rPr>
-              <a:t>—  The fix isn't another point tool — it's a system that reasons across the whole lifecycle</a:t>
+              <a:t>—  The fix isn't another point tool — it's persistent, accountable campaign operations</a:t>
             </a:r>
           </a:p>
         </p:txBody>
@@ -4806,8 +4806,8 @@
         </p:nvSpPr>
         <p:spPr>
           <a:xfrm>
-            <a:off x="502920" y="914400"/>
-            <a:ext cx="10515600" cy="640080"/>
+            <a:off x="502920" y="868680"/>
+            <a:ext cx="11155680" cy="640080"/>
           </a:xfrm>
           <a:prstGeom prst="rect">
             <a:avLst/>
@@ -4826,13 +4826,13 @@
               </a:lnSpc>
             </a:pPr>
             <a:r>
-              <a:rPr sz="3200" b="1" i="0">
+              <a:rPr sz="2700" b="1" i="0">
                 <a:solidFill>
                   <a:srgbClr val="F2F4F8"/>
                 </a:solidFill>
                 <a:latin typeface="Avenir Next"/>
               </a:rPr>
-              <a:t>What Minds gives us, what Harness adds</a:t>
+              <a:t>Minds + LaunchMinds: Platform and Vertical Control Plane</a:t>
             </a:r>
           </a:p>
         </p:txBody>
@@ -4845,8 +4845,8 @@
         </p:nvSpPr>
         <p:spPr>
           <a:xfrm>
-            <a:off x="502920" y="1645920"/>
-            <a:ext cx="11155680" cy="960120"/>
+            <a:off x="502920" y="1600200"/>
+            <a:ext cx="11155680" cy="1051560"/>
           </a:xfrm>
           <a:prstGeom prst="roundRect">
             <a:avLst>
@@ -4891,8 +4891,8 @@
         </p:nvSpPr>
         <p:spPr>
           <a:xfrm>
-            <a:off x="502920" y="1645920"/>
-            <a:ext cx="73152" cy="960120"/>
+            <a:off x="502920" y="1600200"/>
+            <a:ext cx="73152" cy="1051560"/>
           </a:xfrm>
           <a:prstGeom prst="rect">
             <a:avLst/>
@@ -4935,7 +4935,7 @@
         </p:nvSpPr>
         <p:spPr>
           <a:xfrm>
-            <a:off x="822960" y="1783080"/>
+            <a:off x="822960" y="1746504"/>
             <a:ext cx="10332720" cy="320040"/>
           </a:xfrm>
           <a:prstGeom prst="rect">
@@ -4961,7 +4961,7 @@
                 </a:solidFill>
                 <a:latin typeface="Avenir Next"/>
               </a:rPr>
-              <a:t>MINDS — what it already does natively</a:t>
+              <a:t>MINDS — horizontal agent platform</a:t>
             </a:r>
           </a:p>
         </p:txBody>
@@ -4974,8 +4974,8 @@
         </p:nvSpPr>
         <p:spPr>
           <a:xfrm>
-            <a:off x="822960" y="2148840"/>
-            <a:ext cx="10332720" cy="365760"/>
+            <a:off x="822960" y="2112264"/>
+            <a:ext cx="10332720" cy="457200"/>
           </a:xfrm>
           <a:prstGeom prst="rect">
             <a:avLst/>
@@ -5000,7 +5000,7 @@
                 </a:solidFill>
                 <a:latin typeface="Avenir Next"/>
               </a:rPr>
-              <a:t>Reasoning  ·  its own context &amp; memory  ·  market, campaign &amp; performance analysis</a:t>
+              <a:t>Model routing  ·  identity  ·  memory  ·  Skills  ·  Tools  ·  collaboration  ·  wallet</a:t>
             </a:r>
           </a:p>
         </p:txBody>
@@ -5013,8 +5013,8 @@
         </p:nvSpPr>
         <p:spPr>
           <a:xfrm>
-            <a:off x="502920" y="2624328"/>
-            <a:ext cx="548640" cy="320040"/>
+            <a:off x="502920" y="2706624"/>
+            <a:ext cx="11155680" cy="274320"/>
           </a:xfrm>
           <a:prstGeom prst="rect">
             <a:avLst/>
@@ -5033,7 +5033,7 @@
               </a:lnSpc>
             </a:pPr>
             <a:r>
-              <a:rPr sz="2400" b="0" i="0">
+              <a:rPr sz="2000" b="0" i="0">
                 <a:solidFill>
                   <a:srgbClr val="6B748C"/>
                 </a:solidFill>
@@ -5052,8 +5052,8 @@
         </p:nvSpPr>
         <p:spPr>
           <a:xfrm>
-            <a:off x="1600200" y="2990088"/>
-            <a:ext cx="8778240" cy="868680"/>
+            <a:off x="502920" y="2999232"/>
+            <a:ext cx="11155680" cy="1051560"/>
           </a:xfrm>
           <a:prstGeom prst="roundRect">
             <a:avLst>
@@ -5098,8 +5098,8 @@
         </p:nvSpPr>
         <p:spPr>
           <a:xfrm>
-            <a:off x="1600200" y="2990088"/>
-            <a:ext cx="73152" cy="868680"/>
+            <a:off x="502920" y="2999232"/>
+            <a:ext cx="73152" cy="1051560"/>
           </a:xfrm>
           <a:prstGeom prst="rect">
             <a:avLst/>
@@ -5142,8 +5142,8 @@
         </p:nvSpPr>
         <p:spPr>
           <a:xfrm>
-            <a:off x="1920240" y="3118104"/>
-            <a:ext cx="8138160" cy="320040"/>
+            <a:off x="822960" y="3145536"/>
+            <a:ext cx="10332720" cy="320040"/>
           </a:xfrm>
           <a:prstGeom prst="rect">
             <a:avLst/>
@@ -5168,7 +5168,7 @@
                 </a:solidFill>
                 <a:latin typeface="Avenir Next"/>
               </a:rPr>
-              <a:t>HARNESS — the one layer that's ours</a:t>
+              <a:t>LAUNCHMINDS — campaign operations control plane</a:t>
             </a:r>
           </a:p>
         </p:txBody>
@@ -5181,8 +5181,8 @@
         </p:nvSpPr>
         <p:spPr>
           <a:xfrm>
-            <a:off x="1920240" y="3465576"/>
-            <a:ext cx="8138160" cy="365760"/>
+            <a:off x="822960" y="3511296"/>
+            <a:ext cx="10332720" cy="457200"/>
           </a:xfrm>
           <a:prstGeom prst="rect">
             <a:avLst/>
@@ -5207,25 +5207,64 @@
                 </a:solidFill>
                 <a:latin typeface="Avenir Next"/>
               </a:rPr>
-              <a:t>Enterprise materials  ·  brand working habits  ·  team preferences</a:t>
-            </a:r>
-          </a:p>
-        </p:txBody>
-      </p:sp>
-      <p:sp>
-        <p:nvSpPr>
-          <p:cNvPr id="15" name="Rounded Rectangle 14"/>
+              <a:t>Project intelligence  ·  state  ·  approvals  ·  verification  ·  incentives  ·  settlement  ·  learning</a:t>
+            </a:r>
+          </a:p>
+        </p:txBody>
+      </p:sp>
+      <p:sp>
+        <p:nvSpPr>
+          <p:cNvPr id="15" name="TextBox 14"/>
+          <p:cNvSpPr txBox="1"/>
+          <p:nvPr/>
+        </p:nvSpPr>
+        <p:spPr>
+          <a:xfrm>
+            <a:off x="502920" y="4306824"/>
+            <a:ext cx="11155680" cy="457200"/>
+          </a:xfrm>
+          <a:prstGeom prst="rect">
+            <a:avLst/>
+          </a:prstGeom>
+          <a:noFill/>
+        </p:spPr>
+        <p:txBody>
+          <a:bodyPr wrap="square" anchor="t">
+            <a:spAutoFit/>
+          </a:bodyPr>
+          <a:lstStyle/>
+          <a:p>
+            <a:pPr algn="l">
+              <a:lnSpc>
+                <a:spcPct val="115000"/>
+              </a:lnSpc>
+            </a:pPr>
+            <a:r>
+              <a:rPr sz="1700" b="0" i="1">
+                <a:solidFill>
+                  <a:srgbClr val="F2F4F8"/>
+                </a:solidFill>
+                <a:latin typeface="Avenir Next"/>
+              </a:rPr>
+              <a:t>Minds provides general agency; LaunchMinds provides campaign accountability.</a:t>
+            </a:r>
+          </a:p>
+        </p:txBody>
+      </p:sp>
+      <p:sp>
+        <p:nvSpPr>
+          <p:cNvPr id="16" name="Rounded Rectangle 15"/>
           <p:cNvSpPr/>
           <p:nvPr/>
         </p:nvSpPr>
         <p:spPr>
           <a:xfrm>
-            <a:off x="502920" y="4087368"/>
-            <a:ext cx="11155680" cy="1417320"/>
+            <a:off x="502920" y="4809744"/>
+            <a:ext cx="11155680" cy="640080"/>
           </a:xfrm>
           <a:prstGeom prst="roundRect">
             <a:avLst>
-              <a:gd name="adj" fmla="val 6000"/>
+              <a:gd name="adj" fmla="val 50000"/>
             </a:avLst>
           </a:prstGeom>
           <a:solidFill>
@@ -5260,58 +5299,14 @@
       </p:sp>
       <p:sp>
         <p:nvSpPr>
-          <p:cNvPr id="16" name="Rectangle 15"/>
-          <p:cNvSpPr/>
-          <p:nvPr/>
-        </p:nvSpPr>
-        <p:spPr>
-          <a:xfrm>
-            <a:off x="502920" y="4087368"/>
-            <a:ext cx="82296" cy="1417320"/>
-          </a:xfrm>
-          <a:prstGeom prst="rect">
-            <a:avLst/>
-          </a:prstGeom>
-          <a:solidFill>
-            <a:srgbClr val="5EE6C0"/>
-          </a:solidFill>
-          <a:ln>
-            <a:noFill/>
-          </a:ln>
-          <a:effectLst/>
-        </p:spPr>
-        <p:style>
-          <a:lnRef idx="1">
-            <a:schemeClr val="accent1"/>
-          </a:lnRef>
-          <a:fillRef idx="3">
-            <a:schemeClr val="accent1"/>
-          </a:fillRef>
-          <a:effectRef idx="2">
-            <a:schemeClr val="accent1"/>
-          </a:effectRef>
-          <a:fontRef idx="minor">
-            <a:schemeClr val="lt1"/>
-          </a:fontRef>
-        </p:style>
-        <p:txBody>
-          <a:bodyPr rtlCol="0" anchor="ctr"/>
-          <a:lstStyle/>
-          <a:p>
-            <a:pPr algn="ctr"/>
-          </a:p>
-        </p:txBody>
-      </p:sp>
-      <p:sp>
-        <p:nvSpPr>
           <p:cNvPr id="17" name="TextBox 16"/>
           <p:cNvSpPr txBox="1"/>
           <p:nvPr/>
         </p:nvSpPr>
         <p:spPr>
           <a:xfrm>
-            <a:off x="914400" y="4224528"/>
-            <a:ext cx="10332720" cy="1188720"/>
+            <a:off x="502920" y="4956048"/>
+            <a:ext cx="11155680" cy="365760"/>
           </a:xfrm>
           <a:prstGeom prst="rect">
             <a:avLst/>
@@ -5324,19 +5319,19 @@
           </a:bodyPr>
           <a:lstStyle/>
           <a:p>
-            <a:pPr algn="l">
-              <a:lnSpc>
-                <a:spcPct val="125000"/>
-              </a:lnSpc>
-            </a:pPr>
-            <a:r>
-              <a:rPr sz="1550" b="0" i="1">
-                <a:solidFill>
-                  <a:srgbClr val="F2F4F8"/>
-                </a:solidFill>
-                <a:latin typeface="Avenir Next"/>
-              </a:rPr>
-              <a:t>“LaunchMinds is an AI-native, end-to-end brand marketing platform that leverages Harness to build proprietary enterprise contexts, automating the entire lifecycle from campaign design and multi-platform deployment to resource orchestration.”</a:t>
+            <a:pPr algn="ctr">
+              <a:lnSpc>
+                <a:spcPct val="115000"/>
+              </a:lnSpc>
+            </a:pPr>
+            <a:r>
+              <a:rPr sz="1600" b="1" i="0">
+                <a:solidFill>
+                  <a:srgbClr val="5EE6C0"/>
+                </a:solidFill>
+                <a:latin typeface="Avenir Next"/>
+              </a:rPr>
+              <a:t>Objective  →  Approve  →  Execute  →  Verify  →  Settle  →  Learn</a:t>
             </a:r>
           </a:p>
         </p:txBody>
@@ -5344,61 +5339,6 @@
       <p:sp>
         <p:nvSpPr>
           <p:cNvPr id="18" name="TextBox 17"/>
-          <p:cNvSpPr txBox="1"/>
-          <p:nvPr/>
-        </p:nvSpPr>
-        <p:spPr>
-          <a:xfrm>
-            <a:off x="502920" y="5641848"/>
-            <a:ext cx="10789920" cy="548640"/>
-          </a:xfrm>
-          <a:prstGeom prst="rect">
-            <a:avLst/>
-          </a:prstGeom>
-          <a:noFill/>
-        </p:spPr>
-        <p:txBody>
-          <a:bodyPr wrap="square" anchor="t">
-            <a:spAutoFit/>
-          </a:bodyPr>
-          <a:lstStyle/>
-          <a:p>
-            <a:pPr algn="l">
-              <a:lnSpc>
-                <a:spcPct val="125000"/>
-              </a:lnSpc>
-            </a:pPr>
-            <a:r>
-              <a:rPr sz="1450" b="0" i="1">
-                <a:solidFill>
-                  <a:srgbClr val="5EE6C0"/>
-                </a:solidFill>
-                <a:latin typeface="Avenir Next"/>
-              </a:rPr>
-              <a:t>Not two stacked layers — Minds doing what it already does natively,</a:t>
-            </a:r>
-          </a:p>
-          <a:p>
-            <a:pPr algn="l">
-              <a:lnSpc>
-                <a:spcPct val="125000"/>
-              </a:lnSpc>
-            </a:pPr>
-            <a:r>
-              <a:rPr sz="1450" b="0" i="1">
-                <a:solidFill>
-                  <a:srgbClr val="5EE6C0"/>
-                </a:solidFill>
-                <a:latin typeface="Avenir Next"/>
-              </a:rPr>
-              <a:t>Harness adding the one layer that's ours.</a:t>
-            </a:r>
-          </a:p>
-        </p:txBody>
-      </p:sp>
-      <p:sp>
-        <p:nvSpPr>
-          <p:cNvPr id="19" name="TextBox 18"/>
           <p:cNvSpPr txBox="1"/>
           <p:nvPr/>
         </p:nvSpPr>
@@ -6154,7 +6094,7 @@
                 </a:solidFill>
                 <a:latin typeface="Avenir Next"/>
               </a:rPr>
-              <a:t>Agent</a:t>
+              <a:t>Persistent,</a:t>
             </a:r>
           </a:p>
           <a:p>
@@ -6170,7 +6110,7 @@
                 </a:solidFill>
                 <a:latin typeface="Avenir Next"/>
               </a:rPr>
-              <a:t>Mode</a:t>
+              <a:t>Bounded Ops</a:t>
             </a:r>
           </a:p>
         </p:txBody>
@@ -6887,7 +6827,7 @@
                 </a:solidFill>
                 <a:latin typeface="Avenir Next"/>
               </a:rPr>
-              <a:t>—  Minds proposes structure, drafts copy</a:t>
+              <a:t>—  Minds drafts campaign structures, task mechanics, and copy</a:t>
             </a:r>
           </a:p>
           <a:p>
@@ -6906,7 +6846,7 @@
                 </a:solidFill>
                 <a:latin typeface="Avenir Next"/>
               </a:rPr>
-              <a:t>—  Pulls in context Harness has already stored</a:t>
+              <a:t>—  Grounded in trusted project intelligence maintained by LaunchMinds</a:t>
             </a:r>
           </a:p>
           <a:p>
@@ -6925,7 +6865,7 @@
                 </a:solidFill>
                 <a:latin typeface="Avenir Next"/>
               </a:rPr>
-              <a:t>—  Human in the loop at every step</a:t>
+              <a:t>—  Human approves every output</a:t>
             </a:r>
           </a:p>
         </p:txBody>
@@ -6964,7 +6904,7 @@
                 </a:solidFill>
                 <a:latin typeface="Avenir Next"/>
               </a:rPr>
-              <a:t>Already saving our team real hours today.</a:t>
+              <a:t>Speed and consistency — but the human still owns every step.</a:t>
             </a:r>
           </a:p>
         </p:txBody>
@@ -7661,7 +7601,7 @@
                 </a:solidFill>
                 <a:latin typeface="Avenir Next"/>
               </a:rPr>
-              <a:t>—  Runs on our internal skill system: structured capabilities we hand to Minds so it can act, not just suggest</a:t>
+              <a:t>—  Runs through campaign-specific Skills, Tools, state, and approval gates on Minds</a:t>
             </a:r>
           </a:p>
           <a:p>
@@ -7680,7 +7620,7 @@
                 </a:solidFill>
                 <a:latin typeface="Avenir Next"/>
               </a:rPr>
-              <a:t>—  Minds doing real autonomous work within a session</a:t>
+              <a:t>—  Minds supplies the persistent runtime and execution; LaunchMinds supplies the campaign intelligence and permissions</a:t>
             </a:r>
           </a:p>
         </p:txBody>
@@ -7719,7 +7659,7 @@
                 </a:solidFill>
                 <a:latin typeface="Avenir Next"/>
               </a:rPr>
-              <a:t>The first stage where Minds truly acts, not just assists.</a:t>
+              <a:t>The Mind stops only suggesting and starts completing real operational work.</a:t>
             </a:r>
           </a:p>
         </p:txBody>
@@ -7919,8 +7859,8 @@
         </p:nvSpPr>
         <p:spPr>
           <a:xfrm>
-            <a:off x="502920" y="914400"/>
-            <a:ext cx="7772400" cy="640080"/>
+            <a:off x="502920" y="896112"/>
+            <a:ext cx="8778240" cy="1234440"/>
           </a:xfrm>
           <a:prstGeom prst="rect">
             <a:avLst/>
@@ -7939,13 +7879,29 @@
               </a:lnSpc>
             </a:pPr>
             <a:r>
-              <a:rPr sz="3200" b="1" i="0">
+              <a:rPr sz="2800" b="1" i="0">
                 <a:solidFill>
                   <a:srgbClr val="F2F4F8"/>
                 </a:solidFill>
                 <a:latin typeface="Avenir Next"/>
               </a:rPr>
-              <a:t>Stage 3: Agent Mode</a:t>
+              <a:t>Stage 3: Persistent, Bounded</a:t>
+            </a:r>
+          </a:p>
+          <a:p>
+            <a:pPr algn="l">
+              <a:lnSpc>
+                <a:spcPct val="115000"/>
+              </a:lnSpc>
+            </a:pPr>
+            <a:r>
+              <a:rPr sz="2800" b="1" i="0">
+                <a:solidFill>
+                  <a:srgbClr val="F2F4F8"/>
+                </a:solidFill>
+                <a:latin typeface="Avenir Next"/>
+              </a:rPr>
+              <a:t>Campaign Operations</a:t>
             </a:r>
           </a:p>
         </p:txBody>
@@ -7958,7 +7914,7 @@
         </p:nvSpPr>
         <p:spPr>
           <a:xfrm>
-            <a:off x="9692640" y="987552"/>
+            <a:off x="9464040" y="987552"/>
             <a:ext cx="2505456" cy="292608"/>
           </a:xfrm>
           <a:prstGeom prst="roundRect">
@@ -8009,47 +7965,119 @@
       </p:sp>
       <p:sp>
         <p:nvSpPr>
-          <p:cNvPr id="7" name="Rounded Rectangle 6"/>
-          <p:cNvSpPr/>
-          <p:nvPr/>
-        </p:nvSpPr>
-        <p:spPr>
-          <a:xfrm>
-            <a:off x="502920" y="1783080"/>
-            <a:ext cx="5440680" cy="4206240"/>
-          </a:xfrm>
-          <a:prstGeom prst="roundRect">
-            <a:avLst>
-              <a:gd name="adj" fmla="val 5000"/>
-            </a:avLst>
-          </a:prstGeom>
-          <a:solidFill>
-            <a:srgbClr val="141B2E"/>
-          </a:solidFill>
-          <a:ln>
-            <a:noFill/>
-          </a:ln>
-          <a:effectLst/>
-        </p:spPr>
-        <p:style>
-          <a:lnRef idx="1">
-            <a:schemeClr val="accent1"/>
-          </a:lnRef>
-          <a:fillRef idx="3">
-            <a:schemeClr val="accent1"/>
-          </a:fillRef>
-          <a:effectRef idx="2">
-            <a:schemeClr val="accent1"/>
-          </a:effectRef>
-          <a:fontRef idx="minor">
-            <a:schemeClr val="lt1"/>
-          </a:fontRef>
-        </p:style>
-        <p:txBody>
-          <a:bodyPr rtlCol="0" anchor="ctr"/>
-          <a:lstStyle/>
-          <a:p>
-            <a:pPr algn="ctr"/>
+          <p:cNvPr id="7" name="TextBox 6"/>
+          <p:cNvSpPr txBox="1"/>
+          <p:nvPr/>
+        </p:nvSpPr>
+        <p:spPr>
+          <a:xfrm>
+            <a:off x="502920" y="2331720"/>
+            <a:ext cx="10789920" cy="3291840"/>
+          </a:xfrm>
+          <a:prstGeom prst="rect">
+            <a:avLst/>
+          </a:prstGeom>
+          <a:noFill/>
+        </p:spPr>
+        <p:txBody>
+          <a:bodyPr wrap="square">
+            <a:spAutoFit/>
+          </a:bodyPr>
+          <a:lstStyle/>
+          <a:p>
+            <a:pPr>
+              <a:lnSpc>
+                <a:spcPct val="120000"/>
+              </a:lnSpc>
+              <a:spcAft>
+                <a:spcPts val="1600"/>
+              </a:spcAft>
+            </a:pPr>
+            <a:r>
+              <a:rPr sz="1750">
+                <a:solidFill>
+                  <a:srgbClr val="F2F4F8"/>
+                </a:solidFill>
+                <a:latin typeface="Avenir Next"/>
+              </a:rPr>
+              <a:t>—  Long-running project workspace with shared campaign state and evidence</a:t>
+            </a:r>
+          </a:p>
+          <a:p>
+            <a:pPr>
+              <a:lnSpc>
+                <a:spcPct val="120000"/>
+              </a:lnSpc>
+              <a:spcAft>
+                <a:spcPts val="1600"/>
+              </a:spcAft>
+            </a:pPr>
+            <a:r>
+              <a:rPr sz="1750">
+                <a:solidFill>
+                  <a:srgbClr val="F2F4F8"/>
+                </a:solidFill>
+                <a:latin typeface="Avenir Next"/>
+              </a:rPr>
+              <a:t>—  A dynamic team of Minds assembled around each objective</a:t>
+            </a:r>
+          </a:p>
+          <a:p>
+            <a:pPr>
+              <a:lnSpc>
+                <a:spcPct val="120000"/>
+              </a:lnSpc>
+              <a:spcAft>
+                <a:spcPts val="1600"/>
+              </a:spcAft>
+            </a:pPr>
+            <a:r>
+              <a:rPr sz="1750">
+                <a:solidFill>
+                  <a:srgbClr val="F2F4F8"/>
+                </a:solidFill>
+                <a:latin typeface="Avenir Next"/>
+              </a:rPr>
+              <a:t>—  Approval gates for launch, budget changes, and settlement</a:t>
+            </a:r>
+          </a:p>
+          <a:p>
+            <a:pPr>
+              <a:lnSpc>
+                <a:spcPct val="120000"/>
+              </a:lnSpc>
+              <a:spcAft>
+                <a:spcPts val="1600"/>
+              </a:spcAft>
+            </a:pPr>
+            <a:r>
+              <a:rPr sz="1750">
+                <a:solidFill>
+                  <a:srgbClr val="F2F4F8"/>
+                </a:solidFill>
+                <a:latin typeface="Avenir Next"/>
+              </a:rPr>
+              <a:t>—  Verify before reward; recover from failure; log every action</a:t>
+            </a:r>
+          </a:p>
+          <a:p>
+            <a:pPr>
+              <a:lnSpc>
+                <a:spcPct val="120000"/>
+              </a:lnSpc>
+              <a:spcAft>
+                <a:spcPts val="1600"/>
+              </a:spcAft>
+            </a:pPr>
+            <a:r>
+              <a:rPr sz="1750">
+                <a:solidFill>
+                  <a:srgbClr val="F2F4F8"/>
+                </a:solidFill>
+                <a:latin typeface="Avenir Next"/>
+              </a:rPr>
+              <a:t>—  Every outcome improves the next campaign</a:t>
+            </a:r>
           </a:p>
         </p:txBody>
       </p:sp>
@@ -8061,8 +8089,8 @@
         </p:nvSpPr>
         <p:spPr>
           <a:xfrm>
-            <a:off x="868680" y="2103120"/>
-            <a:ext cx="4709160" cy="457200"/>
+            <a:off x="502920" y="5806440"/>
+            <a:ext cx="10789920" cy="457200"/>
           </a:xfrm>
           <a:prstGeom prst="rect">
             <a:avLst/>
@@ -8081,13 +8109,13 @@
               </a:lnSpc>
             </a:pPr>
             <a:r>
-              <a:rPr sz="1400" b="1" i="0">
-                <a:solidFill>
-                  <a:srgbClr val="6B748C"/>
-                </a:solidFill>
-                <a:latin typeface="Avenir Next"/>
-              </a:rPr>
-              <a:t>IN CODING</a:t>
+              <a:rPr sz="1450" b="0" i="1">
+                <a:solidFill>
+                  <a:srgbClr val="5EE6C0"/>
+                </a:solidFill>
+                <a:latin typeface="Avenir Next"/>
+              </a:rPr>
+              <a:t>The shape of the team follows the work — not a fixed pipeline of roles.</a:t>
             </a:r>
           </a:p>
         </p:txBody>
@@ -8095,412 +8123,6 @@
       <p:sp>
         <p:nvSpPr>
           <p:cNvPr id="9" name="TextBox 8"/>
-          <p:cNvSpPr txBox="1"/>
-          <p:nvPr/>
-        </p:nvSpPr>
-        <p:spPr>
-          <a:xfrm>
-            <a:off x="868680" y="2514600"/>
-            <a:ext cx="4709160" cy="548640"/>
-          </a:xfrm>
-          <a:prstGeom prst="rect">
-            <a:avLst/>
-          </a:prstGeom>
-          <a:noFill/>
-        </p:spPr>
-        <p:txBody>
-          <a:bodyPr wrap="square" anchor="t">
-            <a:spAutoFit/>
-          </a:bodyPr>
-          <a:lstStyle/>
-          <a:p>
-            <a:pPr algn="l">
-              <a:lnSpc>
-                <a:spcPct val="120000"/>
-              </a:lnSpc>
-            </a:pPr>
-            <a:r>
-              <a:rPr sz="1900" b="1" i="0">
-                <a:solidFill>
-                  <a:srgbClr val="A6AFC2"/>
-                </a:solidFill>
-                <a:latin typeface="Avenir Next"/>
-              </a:rPr>
-              <a:t>Long-running, autonomous, self-checking</a:t>
-            </a:r>
-          </a:p>
-        </p:txBody>
-      </p:sp>
-      <p:sp>
-        <p:nvSpPr>
-          <p:cNvPr id="10" name="TextBox 9"/>
-          <p:cNvSpPr txBox="1"/>
-          <p:nvPr/>
-        </p:nvSpPr>
-        <p:spPr>
-          <a:xfrm>
-            <a:off x="868680" y="3200400"/>
-            <a:ext cx="4709160" cy="2560320"/>
-          </a:xfrm>
-          <a:prstGeom prst="rect">
-            <a:avLst/>
-          </a:prstGeom>
-          <a:noFill/>
-        </p:spPr>
-        <p:txBody>
-          <a:bodyPr wrap="square">
-            <a:spAutoFit/>
-          </a:bodyPr>
-          <a:lstStyle/>
-          <a:p>
-            <a:pPr>
-              <a:lnSpc>
-                <a:spcPct val="120000"/>
-              </a:lnSpc>
-              <a:spcAft>
-                <a:spcPts val="1200"/>
-              </a:spcAft>
-            </a:pPr>
-            <a:r>
-              <a:rPr sz="1450">
-                <a:solidFill>
-                  <a:srgbClr val="A6AFC2"/>
-                </a:solidFill>
-                <a:latin typeface="Avenir Next"/>
-              </a:rPr>
-              <a:t>—  Not one session — a persistent, ongoing system</a:t>
-            </a:r>
-          </a:p>
-          <a:p>
-            <a:pPr>
-              <a:lnSpc>
-                <a:spcPct val="120000"/>
-              </a:lnSpc>
-              <a:spcAft>
-                <a:spcPts val="1200"/>
-              </a:spcAft>
-            </a:pPr>
-            <a:r>
-              <a:rPr sz="1450">
-                <a:solidFill>
-                  <a:srgbClr val="A6AFC2"/>
-                </a:solidFill>
-                <a:latin typeface="Avenir Next"/>
-              </a:rPr>
-              <a:t>—  Checks and corrects its own work over time</a:t>
-            </a:r>
-          </a:p>
-        </p:txBody>
-      </p:sp>
-      <p:sp>
-        <p:nvSpPr>
-          <p:cNvPr id="11" name="Rounded Rectangle 10"/>
-          <p:cNvSpPr/>
-          <p:nvPr/>
-        </p:nvSpPr>
-        <p:spPr>
-          <a:xfrm>
-            <a:off x="6263640" y="1783080"/>
-            <a:ext cx="5440680" cy="4206240"/>
-          </a:xfrm>
-          <a:prstGeom prst="roundRect">
-            <a:avLst>
-              <a:gd name="adj" fmla="val 5000"/>
-            </a:avLst>
-          </a:prstGeom>
-          <a:solidFill>
-            <a:srgbClr val="182138"/>
-          </a:solidFill>
-          <a:ln>
-            <a:noFill/>
-          </a:ln>
-          <a:effectLst/>
-        </p:spPr>
-        <p:style>
-          <a:lnRef idx="1">
-            <a:schemeClr val="accent1"/>
-          </a:lnRef>
-          <a:fillRef idx="3">
-            <a:schemeClr val="accent1"/>
-          </a:fillRef>
-          <a:effectRef idx="2">
-            <a:schemeClr val="accent1"/>
-          </a:effectRef>
-          <a:fontRef idx="minor">
-            <a:schemeClr val="lt1"/>
-          </a:fontRef>
-        </p:style>
-        <p:txBody>
-          <a:bodyPr rtlCol="0" anchor="ctr"/>
-          <a:lstStyle/>
-          <a:p>
-            <a:pPr algn="ctr"/>
-          </a:p>
-        </p:txBody>
-      </p:sp>
-      <p:sp>
-        <p:nvSpPr>
-          <p:cNvPr id="12" name="Rectangle 11"/>
-          <p:cNvSpPr/>
-          <p:nvPr/>
-        </p:nvSpPr>
-        <p:spPr>
-          <a:xfrm>
-            <a:off x="6263640" y="1783080"/>
-            <a:ext cx="73152" cy="4206240"/>
-          </a:xfrm>
-          <a:prstGeom prst="rect">
-            <a:avLst/>
-          </a:prstGeom>
-          <a:solidFill>
-            <a:srgbClr val="5EE6C0"/>
-          </a:solidFill>
-          <a:ln>
-            <a:noFill/>
-          </a:ln>
-          <a:effectLst/>
-        </p:spPr>
-        <p:style>
-          <a:lnRef idx="1">
-            <a:schemeClr val="accent1"/>
-          </a:lnRef>
-          <a:fillRef idx="3">
-            <a:schemeClr val="accent1"/>
-          </a:fillRef>
-          <a:effectRef idx="2">
-            <a:schemeClr val="accent1"/>
-          </a:effectRef>
-          <a:fontRef idx="minor">
-            <a:schemeClr val="lt1"/>
-          </a:fontRef>
-        </p:style>
-        <p:txBody>
-          <a:bodyPr rtlCol="0" anchor="ctr"/>
-          <a:lstStyle/>
-          <a:p>
-            <a:pPr algn="ctr"/>
-          </a:p>
-        </p:txBody>
-      </p:sp>
-      <p:sp>
-        <p:nvSpPr>
-          <p:cNvPr id="13" name="TextBox 12"/>
-          <p:cNvSpPr txBox="1"/>
-          <p:nvPr/>
-        </p:nvSpPr>
-        <p:spPr>
-          <a:xfrm>
-            <a:off x="6629400" y="2103120"/>
-            <a:ext cx="4709160" cy="457200"/>
-          </a:xfrm>
-          <a:prstGeom prst="rect">
-            <a:avLst/>
-          </a:prstGeom>
-          <a:noFill/>
-        </p:spPr>
-        <p:txBody>
-          <a:bodyPr wrap="square" anchor="t">
-            <a:spAutoFit/>
-          </a:bodyPr>
-          <a:lstStyle/>
-          <a:p>
-            <a:pPr algn="l">
-              <a:lnSpc>
-                <a:spcPct val="115000"/>
-              </a:lnSpc>
-            </a:pPr>
-            <a:r>
-              <a:rPr sz="1400" b="1" i="0">
-                <a:solidFill>
-                  <a:srgbClr val="5EE6C0"/>
-                </a:solidFill>
-                <a:latin typeface="Avenir Next"/>
-              </a:rPr>
-              <a:t>ON MINDS, IN LAUNCHMINDS</a:t>
-            </a:r>
-          </a:p>
-        </p:txBody>
-      </p:sp>
-      <p:sp>
-        <p:nvSpPr>
-          <p:cNvPr id="14" name="TextBox 13"/>
-          <p:cNvSpPr txBox="1"/>
-          <p:nvPr/>
-        </p:nvSpPr>
-        <p:spPr>
-          <a:xfrm>
-            <a:off x="6629400" y="2514600"/>
-            <a:ext cx="4709160" cy="548640"/>
-          </a:xfrm>
-          <a:prstGeom prst="rect">
-            <a:avLst/>
-          </a:prstGeom>
-          <a:noFill/>
-        </p:spPr>
-        <p:txBody>
-          <a:bodyPr wrap="square" anchor="t">
-            <a:spAutoFit/>
-          </a:bodyPr>
-          <a:lstStyle/>
-          <a:p>
-            <a:pPr algn="l">
-              <a:lnSpc>
-                <a:spcPct val="120000"/>
-              </a:lnSpc>
-            </a:pPr>
-            <a:r>
-              <a:rPr sz="1900" b="1" i="0">
-                <a:solidFill>
-                  <a:srgbClr val="F2F4F8"/>
-                </a:solidFill>
-                <a:latin typeface="Avenir Next"/>
-              </a:rPr>
-              <a:t>A workspace of coordinating Minds</a:t>
-            </a:r>
-          </a:p>
-        </p:txBody>
-      </p:sp>
-      <p:sp>
-        <p:nvSpPr>
-          <p:cNvPr id="15" name="TextBox 14"/>
-          <p:cNvSpPr txBox="1"/>
-          <p:nvPr/>
-        </p:nvSpPr>
-        <p:spPr>
-          <a:xfrm>
-            <a:off x="6629400" y="3200400"/>
-            <a:ext cx="4709160" cy="2560320"/>
-          </a:xfrm>
-          <a:prstGeom prst="rect">
-            <a:avLst/>
-          </a:prstGeom>
-          <a:noFill/>
-        </p:spPr>
-        <p:txBody>
-          <a:bodyPr wrap="square">
-            <a:spAutoFit/>
-          </a:bodyPr>
-          <a:lstStyle/>
-          <a:p>
-            <a:pPr>
-              <a:lnSpc>
-                <a:spcPct val="120000"/>
-              </a:lnSpc>
-              <a:spcAft>
-                <a:spcPts val="1200"/>
-              </a:spcAft>
-            </a:pPr>
-            <a:r>
-              <a:rPr sz="1450">
-                <a:solidFill>
-                  <a:srgbClr val="F2F4F8"/>
-                </a:solidFill>
-                <a:latin typeface="Avenir Next"/>
-              </a:rPr>
-              <a:t>—  Multiple Minds instances working together — plan, execute, analyze, adjust</a:t>
-            </a:r>
-          </a:p>
-          <a:p>
-            <a:pPr>
-              <a:lnSpc>
-                <a:spcPct val="120000"/>
-              </a:lnSpc>
-              <a:spcAft>
-                <a:spcPts val="1200"/>
-              </a:spcAft>
-            </a:pPr>
-            <a:r>
-              <a:rPr sz="1450">
-                <a:solidFill>
-                  <a:srgbClr val="F2F4F8"/>
-                </a:solidFill>
-                <a:latin typeface="Avenir Next"/>
-              </a:rPr>
-              <a:t>—  No fixed pipeline — the group's shape adapts to the project</a:t>
-            </a:r>
-          </a:p>
-          <a:p>
-            <a:pPr>
-              <a:lnSpc>
-                <a:spcPct val="120000"/>
-              </a:lnSpc>
-              <a:spcAft>
-                <a:spcPts val="1200"/>
-              </a:spcAft>
-            </a:pPr>
-            <a:r>
-              <a:rPr sz="1450">
-                <a:solidFill>
-                  <a:srgbClr val="F2F4F8"/>
-                </a:solidFill>
-                <a:latin typeface="Avenir Next"/>
-              </a:rPr>
-              <a:t>—  Analysis leans on Minds' own native market/campaign/performance capability</a:t>
-            </a:r>
-          </a:p>
-          <a:p>
-            <a:pPr>
-              <a:lnSpc>
-                <a:spcPct val="120000"/>
-              </a:lnSpc>
-              <a:spcAft>
-                <a:spcPts val="1200"/>
-              </a:spcAft>
-            </a:pPr>
-            <a:r>
-              <a:rPr sz="1450">
-                <a:solidFill>
-                  <a:srgbClr val="F2F4F8"/>
-                </a:solidFill>
-                <a:latin typeface="Avenir Next"/>
-              </a:rPr>
-              <a:t>—  Harness feeds in what's LaunchMinds-specific: enterprise materials, habits, team preferences</a:t>
-            </a:r>
-          </a:p>
-        </p:txBody>
-      </p:sp>
-      <p:sp>
-        <p:nvSpPr>
-          <p:cNvPr id="16" name="TextBox 15"/>
-          <p:cNvSpPr txBox="1"/>
-          <p:nvPr/>
-        </p:nvSpPr>
-        <p:spPr>
-          <a:xfrm>
-            <a:off x="502920" y="6172200"/>
-            <a:ext cx="10789920" cy="365760"/>
-          </a:xfrm>
-          <a:prstGeom prst="rect">
-            <a:avLst/>
-          </a:prstGeom>
-          <a:noFill/>
-        </p:spPr>
-        <p:txBody>
-          <a:bodyPr wrap="square" anchor="t">
-            <a:spAutoFit/>
-          </a:bodyPr>
-          <a:lstStyle/>
-          <a:p>
-            <a:pPr algn="l">
-              <a:lnSpc>
-                <a:spcPct val="115000"/>
-              </a:lnSpc>
-            </a:pPr>
-            <a:r>
-              <a:rPr sz="1350" b="0" i="1">
-                <a:solidFill>
-                  <a:srgbClr val="6B748C"/>
-                </a:solidFill>
-                <a:latin typeface="Avenir Next"/>
-              </a:rPr>
-              <a:t>The clearest place you'll see what your platform makes possible.</a:t>
-            </a:r>
-          </a:p>
-        </p:txBody>
-      </p:sp>
-      <p:sp>
-        <p:nvSpPr>
-          <p:cNvPr id="17" name="TextBox 16"/>
           <p:cNvSpPr txBox="1"/>
           <p:nvPr/>
         </p:nvSpPr>
@@ -9337,7 +8959,7 @@
                 </a:solidFill>
                 <a:latin typeface="Avenir Next"/>
               </a:rPr>
-              <a:t>Multi-Mind workspace</a:t>
+              <a:t>Persistent, bounded ops</a:t>
             </a:r>
           </a:p>
         </p:txBody>
@@ -9446,8 +9068,8 @@
         </p:nvSpPr>
         <p:spPr>
           <a:xfrm>
-            <a:off x="502920" y="4434840"/>
-            <a:ext cx="11155680" cy="1280160"/>
+            <a:off x="502920" y="4343400"/>
+            <a:ext cx="11155680" cy="1371600"/>
           </a:xfrm>
           <a:prstGeom prst="rect">
             <a:avLst/>
@@ -9462,33 +9084,33 @@
           <a:p>
             <a:pPr algn="l">
               <a:lnSpc>
-                <a:spcPct val="120000"/>
-              </a:lnSpc>
-            </a:pPr>
-            <a:r>
-              <a:rPr sz="2500" b="1" i="0">
+                <a:spcPct val="125000"/>
+              </a:lnSpc>
+            </a:pPr>
+            <a:r>
+              <a:rPr sz="2200" b="1" i="0">
                 <a:solidFill>
                   <a:srgbClr val="F2F4F8"/>
                 </a:solidFill>
                 <a:latin typeface="Avenir Next"/>
               </a:rPr>
-              <a:t>What gets built on top of a platform is the best answer</a:t>
+              <a:t>Minds makes agents persistent and capable.</a:t>
             </a:r>
           </a:p>
           <a:p>
             <a:pPr algn="l">
               <a:lnSpc>
-                <a:spcPct val="120000"/>
-              </a:lnSpc>
-            </a:pPr>
-            <a:r>
-              <a:rPr sz="2500" b="1" i="0">
+                <a:spcPct val="125000"/>
+              </a:lnSpc>
+            </a:pPr>
+            <a:r>
+              <a:rPr sz="2200" b="1" i="0">
                 <a:solidFill>
                   <a:srgbClr val="F2F4F8"/>
                 </a:solidFill>
                 <a:latin typeface="Avenir Next"/>
               </a:rPr>
-              <a:t>a platform can have.</a:t>
+              <a:t>LaunchMinds makes campaign operations accountable.</a:t>
             </a:r>
           </a:p>
         </p:txBody>
